--- a/docs/easyEXPRESS-viewers.pptx
+++ b/docs/easyEXPRESS-viewers.pptx
@@ -4,19 +4,31 @@
   <p:sldMasterIdLst>
     <p:sldMasterId id="2147483648" r:id="rId1"/>
   </p:sldMasterIdLst>
+  <p:notesMasterIdLst>
+    <p:notesMasterId r:id="rId23"/>
+  </p:notesMasterIdLst>
   <p:sldIdLst>
-    <p:sldId id="256" r:id="rId7"/>
-    <p:sldId id="257" r:id="rId8"/>
-    <p:sldId id="258" r:id="rId9"/>
-    <p:sldId id="259" r:id="rId10"/>
-    <p:sldId id="260" r:id="rId11"/>
-    <p:sldId id="261" r:id="rId12"/>
-    <p:sldId id="262" r:id="rId13"/>
-    <p:sldId id="263" r:id="rId14"/>
-    <p:sldId id="264" r:id="rId15"/>
-    <p:sldId id="265" r:id="rId16"/>
-    <p:sldId id="266" r:id="rId17"/>
-    <p:sldId id="267" r:id="rId18"/>
+    <p:sldId id="256" r:id="rId2"/>
+    <p:sldId id="257" r:id="rId3"/>
+    <p:sldId id="258" r:id="rId4"/>
+    <p:sldId id="259" r:id="rId5"/>
+    <p:sldId id="260" r:id="rId6"/>
+    <p:sldId id="261" r:id="rId7"/>
+    <p:sldId id="262" r:id="rId8"/>
+    <p:sldId id="263" r:id="rId9"/>
+    <p:sldId id="264" r:id="rId10"/>
+    <p:sldId id="265" r:id="rId11"/>
+    <p:sldId id="266" r:id="rId12"/>
+    <p:sldId id="267" r:id="rId13"/>
+    <p:sldId id="268" r:id="rId14"/>
+    <p:sldId id="269" r:id="rId15"/>
+    <p:sldId id="270" r:id="rId16"/>
+    <p:sldId id="271" r:id="rId17"/>
+    <p:sldId id="272" r:id="rId18"/>
+    <p:sldId id="273" r:id="rId19"/>
+    <p:sldId id="274" r:id="rId20"/>
+    <p:sldId id="275" r:id="rId21"/>
+    <p:sldId id="276" r:id="rId22"/>
   </p:sldIdLst>
   <p:sldSz cx="9144000" cy="6858000" type="screen4x3"/>
   <p:notesSz cx="6858000" cy="9144000"/>
@@ -115,7 +127,463 @@
       </a:defRPr>
     </a:lvl9pPr>
   </p:defaultTextStyle>
+  <p:extLst>
+    <p:ext uri="{EFAFB233-063F-42B5-8137-9DF3F51BA10A}">
+      <p15:sldGuideLst xmlns:p15="http://schemas.microsoft.com/office/powerpoint/2012/main">
+        <p15:guide id="1" orient="horz" pos="2160">
+          <p15:clr>
+            <a:srgbClr val="A4A3A4"/>
+          </p15:clr>
+        </p15:guide>
+        <p15:guide id="2" pos="2880">
+          <p15:clr>
+            <a:srgbClr val="A4A3A4"/>
+          </p15:clr>
+        </p15:guide>
+      </p15:sldGuideLst>
+    </p:ext>
+  </p:extLst>
 </p:presentation>
+</file>
+
+<file path=ppt/notesMasters/notesMaster1.xml><?xml version="1.0" encoding="utf-8"?>
+<p:notesMaster xmlns:a="http://schemas.openxmlformats.org/drawingml/2006/main" xmlns:r="http://schemas.openxmlformats.org/officeDocument/2006/relationships" xmlns:p="http://schemas.openxmlformats.org/presentationml/2006/main">
+  <p:cSld>
+    <p:bg>
+      <p:bgRef idx="1001">
+        <a:schemeClr val="bg1"/>
+      </p:bgRef>
+    </p:bg>
+    <p:spTree>
+      <p:nvGrpSpPr>
+        <p:cNvPr id="1" name=""/>
+        <p:cNvGrpSpPr/>
+        <p:nvPr/>
+      </p:nvGrpSpPr>
+      <p:grpSpPr>
+        <a:xfrm>
+          <a:off x="0" y="0"/>
+          <a:ext cx="0" cy="0"/>
+          <a:chOff x="0" y="0"/>
+          <a:chExt cx="0" cy="0"/>
+        </a:xfrm>
+      </p:grpSpPr>
+      <p:sp>
+        <p:nvSpPr>
+          <p:cNvPr id="2" name="Header Placeholder 1"/>
+          <p:cNvSpPr>
+            <a:spLocks noGrp="1"/>
+          </p:cNvSpPr>
+          <p:nvPr>
+            <p:ph type="hdr" sz="quarter"/>
+          </p:nvPr>
+        </p:nvSpPr>
+        <p:spPr>
+          <a:xfrm>
+            <a:off x="0" y="0"/>
+            <a:ext cx="2971800" cy="458788"/>
+          </a:xfrm>
+          <a:prstGeom prst="rect">
+            <a:avLst/>
+          </a:prstGeom>
+        </p:spPr>
+        <p:txBody>
+          <a:bodyPr vert="horz" lIns="91440" tIns="45720" rIns="91440" bIns="45720" rtlCol="0"/>
+          <a:lstStyle>
+            <a:lvl1pPr algn="l">
+              <a:defRPr sz="1200"/>
+            </a:lvl1pPr>
+          </a:lstStyle>
+          <a:p>
+            <a:endParaRPr lang="en-US"/>
+          </a:p>
+        </p:txBody>
+      </p:sp>
+      <p:sp>
+        <p:nvSpPr>
+          <p:cNvPr id="3" name="Date Placeholder 2"/>
+          <p:cNvSpPr>
+            <a:spLocks noGrp="1"/>
+          </p:cNvSpPr>
+          <p:nvPr>
+            <p:ph type="dt" idx="1"/>
+          </p:nvPr>
+        </p:nvSpPr>
+        <p:spPr>
+          <a:xfrm>
+            <a:off x="3884613" y="0"/>
+            <a:ext cx="2971800" cy="458788"/>
+          </a:xfrm>
+          <a:prstGeom prst="rect">
+            <a:avLst/>
+          </a:prstGeom>
+        </p:spPr>
+        <p:txBody>
+          <a:bodyPr vert="horz" lIns="91440" tIns="45720" rIns="91440" bIns="45720" rtlCol="0"/>
+          <a:lstStyle>
+            <a:lvl1pPr algn="r">
+              <a:defRPr sz="1200"/>
+            </a:lvl1pPr>
+          </a:lstStyle>
+          <a:p>
+            <a:fld id="{90F83CFD-0412-1049-B42F-5D6C06BE0963}" type="datetimeFigureOut">
+              <a:rPr lang="en-US" smtClean="0"/>
+              <a:t>5/2/26</a:t>
+            </a:fld>
+            <a:endParaRPr lang="en-US"/>
+          </a:p>
+        </p:txBody>
+      </p:sp>
+      <p:sp>
+        <p:nvSpPr>
+          <p:cNvPr id="4" name="Slide Image Placeholder 3"/>
+          <p:cNvSpPr>
+            <a:spLocks noGrp="1" noRot="1" noChangeAspect="1"/>
+          </p:cNvSpPr>
+          <p:nvPr>
+            <p:ph type="sldImg" idx="2"/>
+          </p:nvPr>
+        </p:nvSpPr>
+        <p:spPr>
+          <a:xfrm>
+            <a:off x="1371600" y="1143000"/>
+            <a:ext cx="4114800" cy="3086100"/>
+          </a:xfrm>
+          <a:prstGeom prst="rect">
+            <a:avLst/>
+          </a:prstGeom>
+          <a:noFill/>
+          <a:ln w="12700">
+            <a:solidFill>
+              <a:prstClr val="black"/>
+            </a:solidFill>
+          </a:ln>
+        </p:spPr>
+        <p:txBody>
+          <a:bodyPr vert="horz" lIns="91440" tIns="45720" rIns="91440" bIns="45720" rtlCol="0" anchor="ctr"/>
+          <a:lstStyle/>
+          <a:p>
+            <a:endParaRPr lang="en-US"/>
+          </a:p>
+        </p:txBody>
+      </p:sp>
+      <p:sp>
+        <p:nvSpPr>
+          <p:cNvPr id="5" name="Notes Placeholder 4"/>
+          <p:cNvSpPr>
+            <a:spLocks noGrp="1"/>
+          </p:cNvSpPr>
+          <p:nvPr>
+            <p:ph type="body" sz="quarter" idx="3"/>
+          </p:nvPr>
+        </p:nvSpPr>
+        <p:spPr>
+          <a:xfrm>
+            <a:off x="685800" y="4400550"/>
+            <a:ext cx="5486400" cy="3600450"/>
+          </a:xfrm>
+          <a:prstGeom prst="rect">
+            <a:avLst/>
+          </a:prstGeom>
+        </p:spPr>
+        <p:txBody>
+          <a:bodyPr vert="horz" lIns="91440" tIns="45720" rIns="91440" bIns="45720" rtlCol="0"/>
+          <a:lstStyle/>
+          <a:p>
+            <a:pPr lvl="0"/>
+            <a:r>
+              <a:rPr lang="en-US"/>
+              <a:t>Click to edit Master text styles</a:t>
+            </a:r>
+          </a:p>
+          <a:p>
+            <a:pPr lvl="1"/>
+            <a:r>
+              <a:rPr lang="en-US"/>
+              <a:t>Second level</a:t>
+            </a:r>
+          </a:p>
+          <a:p>
+            <a:pPr lvl="2"/>
+            <a:r>
+              <a:rPr lang="en-US"/>
+              <a:t>Third level</a:t>
+            </a:r>
+          </a:p>
+          <a:p>
+            <a:pPr lvl="3"/>
+            <a:r>
+              <a:rPr lang="en-US"/>
+              <a:t>Fourth level</a:t>
+            </a:r>
+          </a:p>
+          <a:p>
+            <a:pPr lvl="4"/>
+            <a:r>
+              <a:rPr lang="en-US"/>
+              <a:t>Fifth level</a:t>
+            </a:r>
+          </a:p>
+        </p:txBody>
+      </p:sp>
+      <p:sp>
+        <p:nvSpPr>
+          <p:cNvPr id="6" name="Footer Placeholder 5"/>
+          <p:cNvSpPr>
+            <a:spLocks noGrp="1"/>
+          </p:cNvSpPr>
+          <p:nvPr>
+            <p:ph type="ftr" sz="quarter" idx="4"/>
+          </p:nvPr>
+        </p:nvSpPr>
+        <p:spPr>
+          <a:xfrm>
+            <a:off x="0" y="8685213"/>
+            <a:ext cx="2971800" cy="458787"/>
+          </a:xfrm>
+          <a:prstGeom prst="rect">
+            <a:avLst/>
+          </a:prstGeom>
+        </p:spPr>
+        <p:txBody>
+          <a:bodyPr vert="horz" lIns="91440" tIns="45720" rIns="91440" bIns="45720" rtlCol="0" anchor="b"/>
+          <a:lstStyle>
+            <a:lvl1pPr algn="l">
+              <a:defRPr sz="1200"/>
+            </a:lvl1pPr>
+          </a:lstStyle>
+          <a:p>
+            <a:endParaRPr lang="en-US"/>
+          </a:p>
+        </p:txBody>
+      </p:sp>
+      <p:sp>
+        <p:nvSpPr>
+          <p:cNvPr id="7" name="Slide Number Placeholder 6"/>
+          <p:cNvSpPr>
+            <a:spLocks noGrp="1"/>
+          </p:cNvSpPr>
+          <p:nvPr>
+            <p:ph type="sldNum" sz="quarter" idx="5"/>
+          </p:nvPr>
+        </p:nvSpPr>
+        <p:spPr>
+          <a:xfrm>
+            <a:off x="3884613" y="8685213"/>
+            <a:ext cx="2971800" cy="458787"/>
+          </a:xfrm>
+          <a:prstGeom prst="rect">
+            <a:avLst/>
+          </a:prstGeom>
+        </p:spPr>
+        <p:txBody>
+          <a:bodyPr vert="horz" lIns="91440" tIns="45720" rIns="91440" bIns="45720" rtlCol="0" anchor="b"/>
+          <a:lstStyle>
+            <a:lvl1pPr algn="r">
+              <a:defRPr sz="1200"/>
+            </a:lvl1pPr>
+          </a:lstStyle>
+          <a:p>
+            <a:fld id="{59BF1384-D428-ED4E-9EAD-1678F5DDFDA1}" type="slidenum">
+              <a:rPr lang="en-US" smtClean="0"/>
+              <a:t>‹#›</a:t>
+            </a:fld>
+            <a:endParaRPr lang="en-US"/>
+          </a:p>
+        </p:txBody>
+      </p:sp>
+    </p:spTree>
+    <p:extLst>
+      <p:ext uri="{BB962C8B-B14F-4D97-AF65-F5344CB8AC3E}">
+        <p14:creationId xmlns:p14="http://schemas.microsoft.com/office/powerpoint/2010/main" val="3789900690"/>
+      </p:ext>
+    </p:extLst>
+  </p:cSld>
+  <p:clrMap bg1="lt1" tx1="dk1" bg2="lt2" tx2="dk2" accent1="accent1" accent2="accent2" accent3="accent3" accent4="accent4" accent5="accent5" accent6="accent6" hlink="hlink" folHlink="folHlink"/>
+  <p:notesStyle>
+    <a:lvl1pPr marL="0" algn="l" defTabSz="914400" rtl="0" eaLnBrk="1" latinLnBrk="0" hangingPunct="1">
+      <a:defRPr sz="1200" kern="1200">
+        <a:solidFill>
+          <a:schemeClr val="tx1"/>
+        </a:solidFill>
+        <a:latin typeface="+mn-lt"/>
+        <a:ea typeface="+mn-ea"/>
+        <a:cs typeface="+mn-cs"/>
+      </a:defRPr>
+    </a:lvl1pPr>
+    <a:lvl2pPr marL="457200" algn="l" defTabSz="914400" rtl="0" eaLnBrk="1" latinLnBrk="0" hangingPunct="1">
+      <a:defRPr sz="1200" kern="1200">
+        <a:solidFill>
+          <a:schemeClr val="tx1"/>
+        </a:solidFill>
+        <a:latin typeface="+mn-lt"/>
+        <a:ea typeface="+mn-ea"/>
+        <a:cs typeface="+mn-cs"/>
+      </a:defRPr>
+    </a:lvl2pPr>
+    <a:lvl3pPr marL="914400" algn="l" defTabSz="914400" rtl="0" eaLnBrk="1" latinLnBrk="0" hangingPunct="1">
+      <a:defRPr sz="1200" kern="1200">
+        <a:solidFill>
+          <a:schemeClr val="tx1"/>
+        </a:solidFill>
+        <a:latin typeface="+mn-lt"/>
+        <a:ea typeface="+mn-ea"/>
+        <a:cs typeface="+mn-cs"/>
+      </a:defRPr>
+    </a:lvl3pPr>
+    <a:lvl4pPr marL="1371600" algn="l" defTabSz="914400" rtl="0" eaLnBrk="1" latinLnBrk="0" hangingPunct="1">
+      <a:defRPr sz="1200" kern="1200">
+        <a:solidFill>
+          <a:schemeClr val="tx1"/>
+        </a:solidFill>
+        <a:latin typeface="+mn-lt"/>
+        <a:ea typeface="+mn-ea"/>
+        <a:cs typeface="+mn-cs"/>
+      </a:defRPr>
+    </a:lvl4pPr>
+    <a:lvl5pPr marL="1828800" algn="l" defTabSz="914400" rtl="0" eaLnBrk="1" latinLnBrk="0" hangingPunct="1">
+      <a:defRPr sz="1200" kern="1200">
+        <a:solidFill>
+          <a:schemeClr val="tx1"/>
+        </a:solidFill>
+        <a:latin typeface="+mn-lt"/>
+        <a:ea typeface="+mn-ea"/>
+        <a:cs typeface="+mn-cs"/>
+      </a:defRPr>
+    </a:lvl5pPr>
+    <a:lvl6pPr marL="2286000" algn="l" defTabSz="914400" rtl="0" eaLnBrk="1" latinLnBrk="0" hangingPunct="1">
+      <a:defRPr sz="1200" kern="1200">
+        <a:solidFill>
+          <a:schemeClr val="tx1"/>
+        </a:solidFill>
+        <a:latin typeface="+mn-lt"/>
+        <a:ea typeface="+mn-ea"/>
+        <a:cs typeface="+mn-cs"/>
+      </a:defRPr>
+    </a:lvl6pPr>
+    <a:lvl7pPr marL="2743200" algn="l" defTabSz="914400" rtl="0" eaLnBrk="1" latinLnBrk="0" hangingPunct="1">
+      <a:defRPr sz="1200" kern="1200">
+        <a:solidFill>
+          <a:schemeClr val="tx1"/>
+        </a:solidFill>
+        <a:latin typeface="+mn-lt"/>
+        <a:ea typeface="+mn-ea"/>
+        <a:cs typeface="+mn-cs"/>
+      </a:defRPr>
+    </a:lvl7pPr>
+    <a:lvl8pPr marL="3200400" algn="l" defTabSz="914400" rtl="0" eaLnBrk="1" latinLnBrk="0" hangingPunct="1">
+      <a:defRPr sz="1200" kern="1200">
+        <a:solidFill>
+          <a:schemeClr val="tx1"/>
+        </a:solidFill>
+        <a:latin typeface="+mn-lt"/>
+        <a:ea typeface="+mn-ea"/>
+        <a:cs typeface="+mn-cs"/>
+      </a:defRPr>
+    </a:lvl8pPr>
+    <a:lvl9pPr marL="3657600" algn="l" defTabSz="914400" rtl="0" eaLnBrk="1" latinLnBrk="0" hangingPunct="1">
+      <a:defRPr sz="1200" kern="1200">
+        <a:solidFill>
+          <a:schemeClr val="tx1"/>
+        </a:solidFill>
+        <a:latin typeface="+mn-lt"/>
+        <a:ea typeface="+mn-ea"/>
+        <a:cs typeface="+mn-cs"/>
+      </a:defRPr>
+    </a:lvl9pPr>
+  </p:notesStyle>
+</p:notesMaster>
+</file>
+
+<file path=ppt/notesSlides/notesSlide1.xml><?xml version="1.0" encoding="utf-8"?>
+<p:notes xmlns:a="http://schemas.openxmlformats.org/drawingml/2006/main" xmlns:r="http://schemas.openxmlformats.org/officeDocument/2006/relationships" xmlns:p="http://schemas.openxmlformats.org/presentationml/2006/main">
+  <p:cSld>
+    <p:spTree>
+      <p:nvGrpSpPr>
+        <p:cNvPr id="1" name=""/>
+        <p:cNvGrpSpPr/>
+        <p:nvPr/>
+      </p:nvGrpSpPr>
+      <p:grpSpPr>
+        <a:xfrm>
+          <a:off x="0" y="0"/>
+          <a:ext cx="0" cy="0"/>
+          <a:chOff x="0" y="0"/>
+          <a:chExt cx="0" cy="0"/>
+        </a:xfrm>
+      </p:grpSpPr>
+      <p:sp>
+        <p:nvSpPr>
+          <p:cNvPr id="2" name="Slide Image Placeholder 1"/>
+          <p:cNvSpPr>
+            <a:spLocks noGrp="1" noRot="1" noChangeAspect="1"/>
+          </p:cNvSpPr>
+          <p:nvPr>
+            <p:ph type="sldImg"/>
+          </p:nvPr>
+        </p:nvSpPr>
+        <p:spPr/>
+      </p:sp>
+      <p:sp>
+        <p:nvSpPr>
+          <p:cNvPr id="3" name="Notes Placeholder 2"/>
+          <p:cNvSpPr>
+            <a:spLocks noGrp="1"/>
+          </p:cNvSpPr>
+          <p:nvPr>
+            <p:ph type="body" idx="1"/>
+          </p:nvPr>
+        </p:nvSpPr>
+        <p:spPr/>
+        <p:txBody>
+          <a:bodyPr/>
+          <a:lstStyle/>
+          <a:p>
+            <a:r>
+              <a:rPr lang="en-US" dirty="0"/>
+              <a:t>We don’t actually care what the value is after </a:t>
+            </a:r>
+            <a:r>
+              <a:rPr lang="en-US"/>
+              <a:t>the semicolon</a:t>
+            </a:r>
+          </a:p>
+        </p:txBody>
+      </p:sp>
+      <p:sp>
+        <p:nvSpPr>
+          <p:cNvPr id="4" name="Slide Number Placeholder 3"/>
+          <p:cNvSpPr>
+            <a:spLocks noGrp="1"/>
+          </p:cNvSpPr>
+          <p:nvPr>
+            <p:ph type="sldNum" sz="quarter" idx="5"/>
+          </p:nvPr>
+        </p:nvSpPr>
+        <p:spPr/>
+        <p:txBody>
+          <a:bodyPr/>
+          <a:lstStyle/>
+          <a:p>
+            <a:fld id="{59BF1384-D428-ED4E-9EAD-1678F5DDFDA1}" type="slidenum">
+              <a:rPr lang="en-US" smtClean="0"/>
+              <a:t>7</a:t>
+            </a:fld>
+            <a:endParaRPr lang="en-US"/>
+          </a:p>
+        </p:txBody>
+      </p:sp>
+    </p:spTree>
+    <p:extLst>
+      <p:ext uri="{BB962C8B-B14F-4D97-AF65-F5344CB8AC3E}">
+        <p14:creationId xmlns:p14="http://schemas.microsoft.com/office/powerpoint/2010/main" val="3083379613"/>
+      </p:ext>
+    </p:extLst>
+  </p:cSld>
+  <p:clrMapOvr>
+    <a:masterClrMapping/>
+  </p:clrMapOvr>
+</p:notes>
 </file>
 
 <file path=ppt/slideLayouts/slideLayout1.xml><?xml version="1.0" encoding="utf-8"?>
@@ -156,10 +624,9 @@
           <a:lstStyle/>
           <a:p>
             <a:r>
-              <a:rPr lang="en-US" smtClean="0"/>
+              <a:rPr lang="en-US"/>
               <a:t>Click to edit Master title style</a:t>
             </a:r>
-            <a:endParaRPr lang="en-US"/>
           </a:p>
         </p:txBody>
       </p:sp>
@@ -275,10 +742,9 @@
           </a:lstStyle>
           <a:p>
             <a:r>
-              <a:rPr lang="en-US" smtClean="0"/>
+              <a:rPr lang="en-US"/>
               <a:t>Click to edit Master subtitle style</a:t>
             </a:r>
-            <a:endParaRPr lang="en-US"/>
           </a:p>
         </p:txBody>
       </p:sp>
@@ -299,7 +765,7 @@
           <a:p>
             <a:fld id="{5BCAD085-E8A6-8845-BD4E-CB4CCA059FC4}" type="datetimeFigureOut">
               <a:rPr lang="en-US" smtClean="0"/>
-              <a:t>1/27/13</a:t>
+              <a:t>5/2/26</a:t>
             </a:fld>
             <a:endParaRPr lang="en-US"/>
           </a:p>
@@ -393,10 +859,9 @@
           <a:lstStyle/>
           <a:p>
             <a:r>
-              <a:rPr lang="en-US" smtClean="0"/>
+              <a:rPr lang="en-US"/>
               <a:t>Click to edit Master title style</a:t>
             </a:r>
-            <a:endParaRPr lang="en-US"/>
           </a:p>
         </p:txBody>
       </p:sp>
@@ -417,38 +882,37 @@
           <a:p>
             <a:pPr lvl="0"/>
             <a:r>
-              <a:rPr lang="en-US" smtClean="0"/>
+              <a:rPr lang="en-US"/>
               <a:t>Click to edit Master text styles</a:t>
             </a:r>
           </a:p>
           <a:p>
             <a:pPr lvl="1"/>
             <a:r>
-              <a:rPr lang="en-US" smtClean="0"/>
+              <a:rPr lang="en-US"/>
               <a:t>Second level</a:t>
             </a:r>
           </a:p>
           <a:p>
             <a:pPr lvl="2"/>
             <a:r>
-              <a:rPr lang="en-US" smtClean="0"/>
+              <a:rPr lang="en-US"/>
               <a:t>Third level</a:t>
             </a:r>
           </a:p>
           <a:p>
             <a:pPr lvl="3"/>
             <a:r>
-              <a:rPr lang="en-US" smtClean="0"/>
+              <a:rPr lang="en-US"/>
               <a:t>Fourth level</a:t>
             </a:r>
           </a:p>
           <a:p>
             <a:pPr lvl="4"/>
             <a:r>
-              <a:rPr lang="en-US" smtClean="0"/>
+              <a:rPr lang="en-US"/>
               <a:t>Fifth level</a:t>
             </a:r>
-            <a:endParaRPr lang="en-US"/>
           </a:p>
         </p:txBody>
       </p:sp>
@@ -469,7 +933,7 @@
           <a:p>
             <a:fld id="{5BCAD085-E8A6-8845-BD4E-CB4CCA059FC4}" type="datetimeFigureOut">
               <a:rPr lang="en-US" smtClean="0"/>
-              <a:t>1/27/13</a:t>
+              <a:t>5/2/26</a:t>
             </a:fld>
             <a:endParaRPr lang="en-US"/>
           </a:p>
@@ -568,10 +1032,9 @@
           <a:lstStyle/>
           <a:p>
             <a:r>
-              <a:rPr lang="en-US" smtClean="0"/>
+              <a:rPr lang="en-US"/>
               <a:t>Click to edit Master title style</a:t>
             </a:r>
-            <a:endParaRPr lang="en-US"/>
           </a:p>
         </p:txBody>
       </p:sp>
@@ -597,38 +1060,37 @@
           <a:p>
             <a:pPr lvl="0"/>
             <a:r>
-              <a:rPr lang="en-US" smtClean="0"/>
+              <a:rPr lang="en-US"/>
               <a:t>Click to edit Master text styles</a:t>
             </a:r>
           </a:p>
           <a:p>
             <a:pPr lvl="1"/>
             <a:r>
-              <a:rPr lang="en-US" smtClean="0"/>
+              <a:rPr lang="en-US"/>
               <a:t>Second level</a:t>
             </a:r>
           </a:p>
           <a:p>
             <a:pPr lvl="2"/>
             <a:r>
-              <a:rPr lang="en-US" smtClean="0"/>
+              <a:rPr lang="en-US"/>
               <a:t>Third level</a:t>
             </a:r>
           </a:p>
           <a:p>
             <a:pPr lvl="3"/>
             <a:r>
-              <a:rPr lang="en-US" smtClean="0"/>
+              <a:rPr lang="en-US"/>
               <a:t>Fourth level</a:t>
             </a:r>
           </a:p>
           <a:p>
             <a:pPr lvl="4"/>
             <a:r>
-              <a:rPr lang="en-US" smtClean="0"/>
+              <a:rPr lang="en-US"/>
               <a:t>Fifth level</a:t>
             </a:r>
-            <a:endParaRPr lang="en-US"/>
           </a:p>
         </p:txBody>
       </p:sp>
@@ -649,7 +1111,7 @@
           <a:p>
             <a:fld id="{5BCAD085-E8A6-8845-BD4E-CB4CCA059FC4}" type="datetimeFigureOut">
               <a:rPr lang="en-US" smtClean="0"/>
-              <a:t>1/27/13</a:t>
+              <a:t>5/2/26</a:t>
             </a:fld>
             <a:endParaRPr lang="en-US"/>
           </a:p>
@@ -743,10 +1205,9 @@
           <a:lstStyle/>
           <a:p>
             <a:r>
-              <a:rPr lang="en-US" smtClean="0"/>
+              <a:rPr lang="en-US"/>
               <a:t>Click to edit Master title style</a:t>
             </a:r>
-            <a:endParaRPr lang="en-US"/>
           </a:p>
         </p:txBody>
       </p:sp>
@@ -767,38 +1228,37 @@
           <a:p>
             <a:pPr lvl="0"/>
             <a:r>
-              <a:rPr lang="en-US" smtClean="0"/>
+              <a:rPr lang="en-US"/>
               <a:t>Click to edit Master text styles</a:t>
             </a:r>
           </a:p>
           <a:p>
             <a:pPr lvl="1"/>
             <a:r>
-              <a:rPr lang="en-US" smtClean="0"/>
+              <a:rPr lang="en-US"/>
               <a:t>Second level</a:t>
             </a:r>
           </a:p>
           <a:p>
             <a:pPr lvl="2"/>
             <a:r>
-              <a:rPr lang="en-US" smtClean="0"/>
+              <a:rPr lang="en-US"/>
               <a:t>Third level</a:t>
             </a:r>
           </a:p>
           <a:p>
             <a:pPr lvl="3"/>
             <a:r>
-              <a:rPr lang="en-US" smtClean="0"/>
+              <a:rPr lang="en-US"/>
               <a:t>Fourth level</a:t>
             </a:r>
           </a:p>
           <a:p>
             <a:pPr lvl="4"/>
             <a:r>
-              <a:rPr lang="en-US" smtClean="0"/>
+              <a:rPr lang="en-US"/>
               <a:t>Fifth level</a:t>
             </a:r>
-            <a:endParaRPr lang="en-US"/>
           </a:p>
         </p:txBody>
       </p:sp>
@@ -819,7 +1279,7 @@
           <a:p>
             <a:fld id="{5BCAD085-E8A6-8845-BD4E-CB4CCA059FC4}" type="datetimeFigureOut">
               <a:rPr lang="en-US" smtClean="0"/>
-              <a:t>1/27/13</a:t>
+              <a:t>5/2/26</a:t>
             </a:fld>
             <a:endParaRPr lang="en-US"/>
           </a:p>
@@ -922,10 +1382,9 @@
           </a:lstStyle>
           <a:p>
             <a:r>
-              <a:rPr lang="en-US" smtClean="0"/>
+              <a:rPr lang="en-US"/>
               <a:t>Click to edit Master title style</a:t>
             </a:r>
-            <a:endParaRPr lang="en-US"/>
           </a:p>
         </p:txBody>
       </p:sp>
@@ -1042,7 +1501,7 @@
           <a:p>
             <a:pPr lvl="0"/>
             <a:r>
-              <a:rPr lang="en-US" smtClean="0"/>
+              <a:rPr lang="en-US"/>
               <a:t>Click to edit Master text styles</a:t>
             </a:r>
           </a:p>
@@ -1065,7 +1524,7 @@
           <a:p>
             <a:fld id="{5BCAD085-E8A6-8845-BD4E-CB4CCA059FC4}" type="datetimeFigureOut">
               <a:rPr lang="en-US" smtClean="0"/>
-              <a:t>1/27/13</a:t>
+              <a:t>5/2/26</a:t>
             </a:fld>
             <a:endParaRPr lang="en-US"/>
           </a:p>
@@ -1159,10 +1618,9 @@
           <a:lstStyle/>
           <a:p>
             <a:r>
-              <a:rPr lang="en-US" smtClean="0"/>
+              <a:rPr lang="en-US"/>
               <a:t>Click to edit Master title style</a:t>
             </a:r>
-            <a:endParaRPr lang="en-US"/>
           </a:p>
         </p:txBody>
       </p:sp>
@@ -1216,38 +1674,37 @@
           <a:p>
             <a:pPr lvl="0"/>
             <a:r>
-              <a:rPr lang="en-US" smtClean="0"/>
+              <a:rPr lang="en-US"/>
               <a:t>Click to edit Master text styles</a:t>
             </a:r>
           </a:p>
           <a:p>
             <a:pPr lvl="1"/>
             <a:r>
-              <a:rPr lang="en-US" smtClean="0"/>
+              <a:rPr lang="en-US"/>
               <a:t>Second level</a:t>
             </a:r>
           </a:p>
           <a:p>
             <a:pPr lvl="2"/>
             <a:r>
-              <a:rPr lang="en-US" smtClean="0"/>
+              <a:rPr lang="en-US"/>
               <a:t>Third level</a:t>
             </a:r>
           </a:p>
           <a:p>
             <a:pPr lvl="3"/>
             <a:r>
-              <a:rPr lang="en-US" smtClean="0"/>
+              <a:rPr lang="en-US"/>
               <a:t>Fourth level</a:t>
             </a:r>
           </a:p>
           <a:p>
             <a:pPr lvl="4"/>
             <a:r>
-              <a:rPr lang="en-US" smtClean="0"/>
+              <a:rPr lang="en-US"/>
               <a:t>Fifth level</a:t>
             </a:r>
-            <a:endParaRPr lang="en-US"/>
           </a:p>
         </p:txBody>
       </p:sp>
@@ -1301,38 +1758,37 @@
           <a:p>
             <a:pPr lvl="0"/>
             <a:r>
-              <a:rPr lang="en-US" smtClean="0"/>
+              <a:rPr lang="en-US"/>
               <a:t>Click to edit Master text styles</a:t>
             </a:r>
           </a:p>
           <a:p>
             <a:pPr lvl="1"/>
             <a:r>
-              <a:rPr lang="en-US" smtClean="0"/>
+              <a:rPr lang="en-US"/>
               <a:t>Second level</a:t>
             </a:r>
           </a:p>
           <a:p>
             <a:pPr lvl="2"/>
             <a:r>
-              <a:rPr lang="en-US" smtClean="0"/>
+              <a:rPr lang="en-US"/>
               <a:t>Third level</a:t>
             </a:r>
           </a:p>
           <a:p>
             <a:pPr lvl="3"/>
             <a:r>
-              <a:rPr lang="en-US" smtClean="0"/>
+              <a:rPr lang="en-US"/>
               <a:t>Fourth level</a:t>
             </a:r>
           </a:p>
           <a:p>
             <a:pPr lvl="4"/>
             <a:r>
-              <a:rPr lang="en-US" smtClean="0"/>
+              <a:rPr lang="en-US"/>
               <a:t>Fifth level</a:t>
             </a:r>
-            <a:endParaRPr lang="en-US"/>
           </a:p>
         </p:txBody>
       </p:sp>
@@ -1353,7 +1809,7 @@
           <a:p>
             <a:fld id="{5BCAD085-E8A6-8845-BD4E-CB4CCA059FC4}" type="datetimeFigureOut">
               <a:rPr lang="en-US" smtClean="0"/>
-              <a:t>1/27/13</a:t>
+              <a:t>5/2/26</a:t>
             </a:fld>
             <a:endParaRPr lang="en-US"/>
           </a:p>
@@ -1451,10 +1907,9 @@
           </a:lstStyle>
           <a:p>
             <a:r>
-              <a:rPr lang="en-US" smtClean="0"/>
+              <a:rPr lang="en-US"/>
               <a:t>Click to edit Master title style</a:t>
             </a:r>
-            <a:endParaRPr lang="en-US"/>
           </a:p>
         </p:txBody>
       </p:sp>
@@ -1517,7 +1972,7 @@
           <a:p>
             <a:pPr lvl="0"/>
             <a:r>
-              <a:rPr lang="en-US" smtClean="0"/>
+              <a:rPr lang="en-US"/>
               <a:t>Click to edit Master text styles</a:t>
             </a:r>
           </a:p>
@@ -1573,38 +2028,37 @@
           <a:p>
             <a:pPr lvl="0"/>
             <a:r>
-              <a:rPr lang="en-US" smtClean="0"/>
+              <a:rPr lang="en-US"/>
               <a:t>Click to edit Master text styles</a:t>
             </a:r>
           </a:p>
           <a:p>
             <a:pPr lvl="1"/>
             <a:r>
-              <a:rPr lang="en-US" smtClean="0"/>
+              <a:rPr lang="en-US"/>
               <a:t>Second level</a:t>
             </a:r>
           </a:p>
           <a:p>
             <a:pPr lvl="2"/>
             <a:r>
-              <a:rPr lang="en-US" smtClean="0"/>
+              <a:rPr lang="en-US"/>
               <a:t>Third level</a:t>
             </a:r>
           </a:p>
           <a:p>
             <a:pPr lvl="3"/>
             <a:r>
-              <a:rPr lang="en-US" smtClean="0"/>
+              <a:rPr lang="en-US"/>
               <a:t>Fourth level</a:t>
             </a:r>
           </a:p>
           <a:p>
             <a:pPr lvl="4"/>
             <a:r>
-              <a:rPr lang="en-US" smtClean="0"/>
+              <a:rPr lang="en-US"/>
               <a:t>Fifth level</a:t>
             </a:r>
-            <a:endParaRPr lang="en-US"/>
           </a:p>
         </p:txBody>
       </p:sp>
@@ -1667,7 +2121,7 @@
           <a:p>
             <a:pPr lvl="0"/>
             <a:r>
-              <a:rPr lang="en-US" smtClean="0"/>
+              <a:rPr lang="en-US"/>
               <a:t>Click to edit Master text styles</a:t>
             </a:r>
           </a:p>
@@ -1723,38 +2177,37 @@
           <a:p>
             <a:pPr lvl="0"/>
             <a:r>
-              <a:rPr lang="en-US" smtClean="0"/>
+              <a:rPr lang="en-US"/>
               <a:t>Click to edit Master text styles</a:t>
             </a:r>
           </a:p>
           <a:p>
             <a:pPr lvl="1"/>
             <a:r>
-              <a:rPr lang="en-US" smtClean="0"/>
+              <a:rPr lang="en-US"/>
               <a:t>Second level</a:t>
             </a:r>
           </a:p>
           <a:p>
             <a:pPr lvl="2"/>
             <a:r>
-              <a:rPr lang="en-US" smtClean="0"/>
+              <a:rPr lang="en-US"/>
               <a:t>Third level</a:t>
             </a:r>
           </a:p>
           <a:p>
             <a:pPr lvl="3"/>
             <a:r>
-              <a:rPr lang="en-US" smtClean="0"/>
+              <a:rPr lang="en-US"/>
               <a:t>Fourth level</a:t>
             </a:r>
           </a:p>
           <a:p>
             <a:pPr lvl="4"/>
             <a:r>
-              <a:rPr lang="en-US" smtClean="0"/>
+              <a:rPr lang="en-US"/>
               <a:t>Fifth level</a:t>
             </a:r>
-            <a:endParaRPr lang="en-US"/>
           </a:p>
         </p:txBody>
       </p:sp>
@@ -1775,7 +2228,7 @@
           <a:p>
             <a:fld id="{5BCAD085-E8A6-8845-BD4E-CB4CCA059FC4}" type="datetimeFigureOut">
               <a:rPr lang="en-US" smtClean="0"/>
-              <a:t>1/27/13</a:t>
+              <a:t>5/2/26</a:t>
             </a:fld>
             <a:endParaRPr lang="en-US"/>
           </a:p>
@@ -1869,10 +2322,9 @@
           <a:lstStyle/>
           <a:p>
             <a:r>
-              <a:rPr lang="en-US" smtClean="0"/>
+              <a:rPr lang="en-US"/>
               <a:t>Click to edit Master title style</a:t>
             </a:r>
-            <a:endParaRPr lang="en-US"/>
           </a:p>
         </p:txBody>
       </p:sp>
@@ -1893,7 +2345,7 @@
           <a:p>
             <a:fld id="{5BCAD085-E8A6-8845-BD4E-CB4CCA059FC4}" type="datetimeFigureOut">
               <a:rPr lang="en-US" smtClean="0"/>
-              <a:t>1/27/13</a:t>
+              <a:t>5/2/26</a:t>
             </a:fld>
             <a:endParaRPr lang="en-US"/>
           </a:p>
@@ -1988,7 +2440,7 @@
           <a:p>
             <a:fld id="{5BCAD085-E8A6-8845-BD4E-CB4CCA059FC4}" type="datetimeFigureOut">
               <a:rPr lang="en-US" smtClean="0"/>
-              <a:t>1/27/13</a:t>
+              <a:t>5/2/26</a:t>
             </a:fld>
             <a:endParaRPr lang="en-US"/>
           </a:p>
@@ -2091,10 +2543,9 @@
           </a:lstStyle>
           <a:p>
             <a:r>
-              <a:rPr lang="en-US" smtClean="0"/>
+              <a:rPr lang="en-US"/>
               <a:t>Click to edit Master title style</a:t>
             </a:r>
-            <a:endParaRPr lang="en-US"/>
           </a:p>
         </p:txBody>
       </p:sp>
@@ -2148,38 +2599,37 @@
           <a:p>
             <a:pPr lvl="0"/>
             <a:r>
-              <a:rPr lang="en-US" smtClean="0"/>
+              <a:rPr lang="en-US"/>
               <a:t>Click to edit Master text styles</a:t>
             </a:r>
           </a:p>
           <a:p>
             <a:pPr lvl="1"/>
             <a:r>
-              <a:rPr lang="en-US" smtClean="0"/>
+              <a:rPr lang="en-US"/>
               <a:t>Second level</a:t>
             </a:r>
           </a:p>
           <a:p>
             <a:pPr lvl="2"/>
             <a:r>
-              <a:rPr lang="en-US" smtClean="0"/>
+              <a:rPr lang="en-US"/>
               <a:t>Third level</a:t>
             </a:r>
           </a:p>
           <a:p>
             <a:pPr lvl="3"/>
             <a:r>
-              <a:rPr lang="en-US" smtClean="0"/>
+              <a:rPr lang="en-US"/>
               <a:t>Fourth level</a:t>
             </a:r>
           </a:p>
           <a:p>
             <a:pPr lvl="4"/>
             <a:r>
-              <a:rPr lang="en-US" smtClean="0"/>
+              <a:rPr lang="en-US"/>
               <a:t>Fifth level</a:t>
             </a:r>
-            <a:endParaRPr lang="en-US"/>
           </a:p>
         </p:txBody>
       </p:sp>
@@ -2242,7 +2692,7 @@
           <a:p>
             <a:pPr lvl="0"/>
             <a:r>
-              <a:rPr lang="en-US" smtClean="0"/>
+              <a:rPr lang="en-US"/>
               <a:t>Click to edit Master text styles</a:t>
             </a:r>
           </a:p>
@@ -2265,7 +2715,7 @@
           <a:p>
             <a:fld id="{5BCAD085-E8A6-8845-BD4E-CB4CCA059FC4}" type="datetimeFigureOut">
               <a:rPr lang="en-US" smtClean="0"/>
-              <a:t>1/27/13</a:t>
+              <a:t>5/2/26</a:t>
             </a:fld>
             <a:endParaRPr lang="en-US"/>
           </a:p>
@@ -2368,10 +2818,9 @@
           </a:lstStyle>
           <a:p>
             <a:r>
-              <a:rPr lang="en-US" smtClean="0"/>
+              <a:rPr lang="en-US"/>
               <a:t>Click to edit Master title style</a:t>
             </a:r>
-            <a:endParaRPr lang="en-US"/>
           </a:p>
         </p:txBody>
       </p:sp>
@@ -2495,7 +2944,7 @@
           <a:p>
             <a:pPr lvl="0"/>
             <a:r>
-              <a:rPr lang="en-US" smtClean="0"/>
+              <a:rPr lang="en-US"/>
               <a:t>Click to edit Master text styles</a:t>
             </a:r>
           </a:p>
@@ -2518,7 +2967,7 @@
           <a:p>
             <a:fld id="{5BCAD085-E8A6-8845-BD4E-CB4CCA059FC4}" type="datetimeFigureOut">
               <a:rPr lang="en-US" smtClean="0"/>
-              <a:t>1/27/13</a:t>
+              <a:t>5/2/26</a:t>
             </a:fld>
             <a:endParaRPr lang="en-US"/>
           </a:p>
@@ -2627,10 +3076,9 @@
           <a:lstStyle/>
           <a:p>
             <a:r>
-              <a:rPr lang="en-US" smtClean="0"/>
+              <a:rPr lang="en-US"/>
               <a:t>Click to edit Master title style</a:t>
             </a:r>
-            <a:endParaRPr lang="en-US"/>
           </a:p>
         </p:txBody>
       </p:sp>
@@ -2661,38 +3109,37 @@
           <a:p>
             <a:pPr lvl="0"/>
             <a:r>
-              <a:rPr lang="en-US" smtClean="0"/>
+              <a:rPr lang="en-US"/>
               <a:t>Click to edit Master text styles</a:t>
             </a:r>
           </a:p>
           <a:p>
             <a:pPr lvl="1"/>
             <a:r>
-              <a:rPr lang="en-US" smtClean="0"/>
+              <a:rPr lang="en-US"/>
               <a:t>Second level</a:t>
             </a:r>
           </a:p>
           <a:p>
             <a:pPr lvl="2"/>
             <a:r>
-              <a:rPr lang="en-US" smtClean="0"/>
+              <a:rPr lang="en-US"/>
               <a:t>Third level</a:t>
             </a:r>
           </a:p>
           <a:p>
             <a:pPr lvl="3"/>
             <a:r>
-              <a:rPr lang="en-US" smtClean="0"/>
+              <a:rPr lang="en-US"/>
               <a:t>Fourth level</a:t>
             </a:r>
           </a:p>
           <a:p>
             <a:pPr lvl="4"/>
             <a:r>
-              <a:rPr lang="en-US" smtClean="0"/>
+              <a:rPr lang="en-US"/>
               <a:t>Fifth level</a:t>
             </a:r>
-            <a:endParaRPr lang="en-US"/>
           </a:p>
         </p:txBody>
       </p:sp>
@@ -2731,7 +3178,7 @@
           <a:p>
             <a:fld id="{5BCAD085-E8A6-8845-BD4E-CB4CCA059FC4}" type="datetimeFigureOut">
               <a:rPr lang="en-US" smtClean="0"/>
-              <a:t>1/27/13</a:t>
+              <a:t>5/2/26</a:t>
             </a:fld>
             <a:endParaRPr lang="en-US"/>
           </a:p>
@@ -3090,7 +3537,7 @@
 </file>
 
 <file path=ppt/slides/slide1.xml><?xml version="1.0" encoding="utf-8"?>
-<p:sld xmlns:a="http://schemas.openxmlformats.org/drawingml/2006/main" xmlns:p="http://schemas.openxmlformats.org/presentationml/2006/main" xmlns:r="http://schemas.openxmlformats.org/officeDocument/2006/relationships">
+<p:sld xmlns:a="http://schemas.openxmlformats.org/drawingml/2006/main" xmlns:r="http://schemas.openxmlformats.org/officeDocument/2006/relationships" xmlns:p="http://schemas.openxmlformats.org/presentationml/2006/main">
   <p:cSld>
     <p:spTree>
       <p:nvGrpSpPr>
@@ -3098,7 +3545,14 @@
         <p:cNvGrpSpPr/>
         <p:nvPr/>
       </p:nvGrpSpPr>
-      <p:grpSpPr/>
+      <p:grpSpPr>
+        <a:xfrm>
+          <a:off x="0" y="0"/>
+          <a:ext cx="0" cy="0"/>
+          <a:chOff x="0" y="0"/>
+          <a:chExt cx="0" cy="0"/>
+        </a:xfrm>
+      </p:grpSpPr>
       <p:sp>
         <p:nvSpPr>
           <p:cNvPr id="2" name="Title 1"/>
@@ -3165,7 +3619,7 @@
 </file>
 
 <file path=ppt/slides/slide10.xml><?xml version="1.0" encoding="utf-8"?>
-<p:sld xmlns:a="http://schemas.openxmlformats.org/drawingml/2006/main" xmlns:p="http://schemas.openxmlformats.org/presentationml/2006/main" xmlns:r="http://schemas.openxmlformats.org/officeDocument/2006/relationships">
+<p:sld xmlns:a="http://schemas.openxmlformats.org/drawingml/2006/main" xmlns:r="http://schemas.openxmlformats.org/officeDocument/2006/relationships" xmlns:p="http://schemas.openxmlformats.org/presentationml/2006/main">
   <p:cSld>
     <p:spTree>
       <p:nvGrpSpPr>
@@ -3173,7 +3627,14 @@
         <p:cNvGrpSpPr/>
         <p:nvPr/>
       </p:nvGrpSpPr>
-      <p:grpSpPr/>
+      <p:grpSpPr>
+        <a:xfrm>
+          <a:off x="0" y="0"/>
+          <a:ext cx="0" cy="0"/>
+          <a:chOff x="0" y="0"/>
+          <a:chExt cx="0" cy="0"/>
+        </a:xfrm>
+      </p:grpSpPr>
       <p:sp>
         <p:nvSpPr>
           <p:cNvPr id="2" name="Title 1"/>
@@ -3190,7 +3651,7 @@
           <a:lstStyle/>
           <a:p>
             <a:r>
-              <a:t>Installation and first use</a:t>
+              <a:t>Math rendering — MathJax for hover</a:t>
             </a:r>
           </a:p>
         </p:txBody>
@@ -3215,57 +3676,41 @@
           <a:bodyPr/>
           <a:lstStyle/>
           <a:p>
-            <a:pPr/>
-            <a:r>
-              <a:t>Install:  $ code --install-extension easyexpress-0.4.0.vsix</a:t>
-            </a:r>
-          </a:p>
-          <a:p>
-            <a:pPr/>
-            <a:r>
-              <a:t>Reload VS Code; open a wg12-step .exp file (e.g. geometry_schema.exp).</a:t>
-            </a:r>
-          </a:p>
-          <a:p>
-            <a:pPr/>
-            <a:r>
-              <a:t>Hover any entity → MarkdownString popup with description, links, math.</a:t>
-            </a:r>
-          </a:p>
-          <a:p>
-            <a:pPr/>
-            <a:r>
-              <a:t>Right-click → Show Description → opens webview beside editor.</a:t>
+            <a:r>
+              <a:rPr sz="1800"/>
+              <a:t>Hovers can't host MathML or scripts (CSP-restricted).</a:t>
+            </a:r>
+          </a:p>
+          <a:p>
+            <a:r>
+              <a:rPr sz="1800"/>
+              <a:t>MathJax v4 input/asciimath + output/svg → SVG-as-data-URI &lt;img&gt;.</a:t>
             </a:r>
           </a:p>
           <a:p>
             <a:pPr lvl="1"/>
             <a:r>
-              <a:t>Same content, full Metanorma fidelity, MathML rendered natively.</a:t>
-            </a:r>
-          </a:p>
-          <a:p>
-            <a:pPr/>
-            <a:r>
-              <a:t>Right-click → Show EXPRESS-G Diagram → narrowed picker → click hot-spots.</a:t>
-            </a:r>
-          </a:p>
-          <a:p>
-            <a:pPr/>
-            <a:r>
-              <a:t>Cmd+Shift+P → "Open AsciiMath Playground" → live math editor.</a:t>
-            </a:r>
-          </a:p>
-          <a:p>
-            <a:pPr/>
-            <a:r>
-              <a:t>Output panel → "easyEXPRESS Viewers" → see [perf] timings + diagnostic logs.</a:t>
-            </a:r>
-          </a:p>
-          <a:p>
-            <a:pPr/>
-            <a:r>
-              <a:t>All commands also under Command Palette: "easyEXPRESS: ..."</a:t>
+              <a:rPr sz="1500"/>
+              <a:t>~270 KB; cached in an LRU keyed on AsciiMath source.</a:t>
+            </a:r>
+          </a:p>
+          <a:p>
+            <a:r>
+              <a:rPr sz="1800"/>
+              <a:t>Dual-engine split is deliberate, not an oversight.</a:t>
+            </a:r>
+          </a:p>
+          <a:p>
+            <a:pPr lvl="1"/>
+            <a:r>
+              <a:rPr sz="1500"/>
+              <a:t>"Show full description" link gives one-click access to canonical render.</a:t>
+            </a:r>
+          </a:p>
+          <a:p>
+            <a:r>
+              <a:rPr sz="1800"/>
+              <a:t>Resource limits: per-expression 16 KB, per-document 500 stems, 2 s timeout.</a:t>
             </a:r>
           </a:p>
         </p:txBody>
@@ -3279,7 +3724,7 @@
 </file>
 
 <file path=ppt/slides/slide11.xml><?xml version="1.0" encoding="utf-8"?>
-<p:sld xmlns:a="http://schemas.openxmlformats.org/drawingml/2006/main" xmlns:p="http://schemas.openxmlformats.org/presentationml/2006/main" xmlns:r="http://schemas.openxmlformats.org/officeDocument/2006/relationships">
+<p:sld xmlns:a="http://schemas.openxmlformats.org/drawingml/2006/main" xmlns:r="http://schemas.openxmlformats.org/officeDocument/2006/relationships" xmlns:p="http://schemas.openxmlformats.org/presentationml/2006/main">
   <p:cSld>
     <p:spTree>
       <p:nvGrpSpPr>
@@ -3287,7 +3732,14 @@
         <p:cNvGrpSpPr/>
         <p:nvPr/>
       </p:nvGrpSpPr>
-      <p:grpSpPr/>
+      <p:grpSpPr>
+        <a:xfrm>
+          <a:off x="0" y="0"/>
+          <a:ext cx="0" cy="0"/>
+          <a:chOff x="0" y="0"/>
+          <a:chExt cx="0" cy="0"/>
+        </a:xfrm>
+      </p:grpSpPr>
       <p:sp>
         <p:nvSpPr>
           <p:cNvPr id="2" name="Title 1"/>
@@ -3304,7 +3756,7 @@
           <a:lstStyle/>
           <a:p>
             <a:r>
-              <a:t>Roadmap</a:t>
+              <a:t>Architecture — three processes</a:t>
             </a:r>
           </a:p>
         </p:txBody>
@@ -3329,45 +3781,49 @@
           <a:bodyPr/>
           <a:lstStyle/>
           <a:p>
-            <a:pPr/>
-            <a:r>
-              <a:t>Block-form math: [stem]/[asciimath]/[latexmath] open-blocks (currently inline only).</a:t>
-            </a:r>
-          </a:p>
-          <a:p>
-            <a:pPr/>
-            <a:r>
-              <a:t>EXPRESS-G as customEditor: "Reopen with EXPRESS-G Viewer" on any .svg in the workspace.</a:t>
-            </a:r>
-          </a:p>
-          <a:p>
-            <a:pPr/>
-            <a:r>
-              <a:t>Performance under very large schemas: incremental annotation index updates.</a:t>
-            </a:r>
-          </a:p>
-          <a:p>
-            <a:pPr/>
-            <a:r>
-              <a:t>Cross-extension API consumption: delegate AsciiDoc rendering to upstream asciidoctor-vscode if/when it publishes a public API.</a:t>
-            </a:r>
-          </a:p>
-          <a:p>
-            <a:pPr/>
-            <a:r>
-              <a:t>Language-server-side rendering of math (move MathJax host-side path into the LSP).</a:t>
-            </a:r>
-          </a:p>
-          <a:p>
-            <a:pPr/>
-            <a:r>
-              <a:t>Cross-platform smoke runs: macOS done; Linux/Windows pending volunteer testing.</a:t>
-            </a:r>
-          </a:p>
-          <a:p>
-            <a:pPr/>
-            <a:r>
-              <a:t>Phase 4 deliverables: this deck + companion white paper (docs/easyEXPRESS-viewers.adoc).</a:t>
+            <a:r>
+              <a:rPr sz="1800"/>
+              <a:t>Extension host (Node, 780 KB bundle)</a:t>
+            </a:r>
+          </a:p>
+          <a:p>
+            <a:pPr lvl="1"/>
+            <a:r>
+              <a:rPr sz="1500"/>
+              <a:t>Hover provider, command handlers, webview orchestration.</a:t>
+            </a:r>
+          </a:p>
+          <a:p>
+            <a:r>
+              <a:rPr sz="1800"/>
+              <a:t>Language server (Node, 1.7 MB bundle)</a:t>
+            </a:r>
+          </a:p>
+          <a:p>
+            <a:pPr lvl="1"/>
+            <a:r>
+              <a:rPr sz="1500"/>
+              <a:t>Langium services + ExpressP11AnnotationIndex.</a:t>
+            </a:r>
+          </a:p>
+          <a:p>
+            <a:pPr lvl="1"/>
+            <a:r>
+              <a:rPr sz="1500"/>
+              <a:t>Custom LSP requests: getAnnotations, findAnnotationsForEntity, resolveEntity.</a:t>
+            </a:r>
+          </a:p>
+          <a:p>
+            <a:r>
+              <a:rPr sz="1800"/>
+              <a:t>Webview render targets (Chromium)</a:t>
+            </a:r>
+          </a:p>
+          <a:p>
+            <a:pPr lvl="1"/>
+            <a:r>
+              <a:rPr sz="1500"/>
+              <a:t>One WebviewPanel per surface, isolated CSP, isolated message channel.</a:t>
             </a:r>
           </a:p>
         </p:txBody>
@@ -3381,7 +3837,7 @@
 </file>
 
 <file path=ppt/slides/slide12.xml><?xml version="1.0" encoding="utf-8"?>
-<p:sld xmlns:a="http://schemas.openxmlformats.org/drawingml/2006/main" xmlns:p="http://schemas.openxmlformats.org/presentationml/2006/main" xmlns:r="http://schemas.openxmlformats.org/officeDocument/2006/relationships">
+<p:sld xmlns:a="http://schemas.openxmlformats.org/drawingml/2006/main" xmlns:r="http://schemas.openxmlformats.org/officeDocument/2006/relationships" xmlns:p="http://schemas.openxmlformats.org/presentationml/2006/main">
   <p:cSld>
     <p:spTree>
       <p:nvGrpSpPr>
@@ -3389,7 +3845,14 @@
         <p:cNvGrpSpPr/>
         <p:nvPr/>
       </p:nvGrpSpPr>
-      <p:grpSpPr/>
+      <p:grpSpPr>
+        <a:xfrm>
+          <a:off x="0" y="0"/>
+          <a:ext cx="0" cy="0"/>
+          <a:chOff x="0" y="0"/>
+          <a:chExt cx="0" cy="0"/>
+        </a:xfrm>
+      </p:grpSpPr>
       <p:sp>
         <p:nvSpPr>
           <p:cNvPr id="2" name="Title 1"/>
@@ -3406,7 +3869,7 @@
           <a:lstStyle/>
           <a:p>
             <a:r>
-              <a:t>Questions and contact</a:t>
+              <a:t>Architecture — engines + bundling</a:t>
             </a:r>
           </a:p>
         </p:txBody>
@@ -3431,63 +3894,765 @@
           <a:bodyPr/>
           <a:lstStyle/>
           <a:p>
-            <a:pPr/>
-            <a:r>
-              <a:t>Project repository: github.com/TRThurman/easy-express-mirror</a:t>
-            </a:r>
-          </a:p>
-          <a:p>
-            <a:pPr/>
-            <a:r>
-              <a:t>Upstream: usnistgov/easy-express  (NIST)</a:t>
-            </a:r>
-          </a:p>
-          <a:p>
-            <a:pPr/>
-            <a:r>
-              <a:t>Issue tracker: github.com/TRThurman/easy-express-mirror/issues</a:t>
-            </a:r>
-          </a:p>
-          <a:p>
-            <a:pPr/>
-            <a:r>
-              <a:t>Maintainer: Thomas Thurman  ·  thomas@trthurman.consulting</a:t>
-            </a:r>
-          </a:p>
-          <a:p>
-            <a:pPr/>
-          </a:p>
-          <a:p>
-            <a:pPr/>
-            <a:r>
-              <a:t>Companion white paper: docs/easyEXPRESS-viewers.adoc</a:t>
-            </a:r>
-          </a:p>
-          <a:p>
-            <a:pPr/>
-            <a:r>
-              <a:t>Design protocol document (full architecture + security model):</a:t>
+            <a:r>
+              <a:rPr sz="1800"/>
+              <a:t>Plurimath worker (node:worker_threads, pool=1) — terminate-on-timeout.</a:t>
+            </a:r>
+          </a:p>
+          <a:p>
+            <a:r>
+              <a:rPr sz="1800"/>
+              <a:t>MathJax in extension host — for hover SVG path only.</a:t>
+            </a:r>
+          </a:p>
+          <a:p>
+            <a:r>
+              <a:rPr sz="1800"/>
+              <a:t>Vendor JS pinned to exact versions in package.json.</a:t>
             </a:r>
           </a:p>
           <a:p>
             <a:pPr lvl="1"/>
             <a:r>
-              <a:t>DESIGN-viewers-integration.md (project repository, root)</a:t>
-            </a:r>
-          </a:p>
-          <a:p>
-            <a:pPr/>
-          </a:p>
-          <a:p>
-            <a:pPr/>
-            <a:r>
-              <a:t>Smoke-test checklist for new platforms: docs/smoke-test-checklist.md</a:t>
-            </a:r>
-          </a:p>
-          <a:p>
-            <a:pPr/>
-            <a:r>
-              <a:t>CI matrix (macOS, Ubuntu, Windows): .github/workflows/ci.yaml</a:t>
+              <a:rPr sz="1500"/>
+              <a:t>@plurimath/plurimath and mathjax marked external; loaded at runtime.</a:t>
+            </a:r>
+          </a:p>
+          <a:p>
+            <a:pPr lvl="1"/>
+            <a:r>
+              <a:rPr sz="1500"/>
+              <a:t>@asciidoctor/core, dompurify ship as webview vendor assets.</a:t>
+            </a:r>
+          </a:p>
+          <a:p>
+            <a:r>
+              <a:rPr sz="1800"/>
+              <a:t>esbuild emits CJS bundles; package.json shim flips out/ subtrees to type:commonjs.</a:t>
+            </a:r>
+          </a:p>
+        </p:txBody>
+      </p:sp>
+    </p:spTree>
+  </p:cSld>
+  <p:clrMapOvr>
+    <a:masterClrMapping/>
+  </p:clrMapOvr>
+</p:sld>
+</file>
+
+<file path=ppt/slides/slide13.xml><?xml version="1.0" encoding="utf-8"?>
+<p:sld xmlns:a="http://schemas.openxmlformats.org/drawingml/2006/main" xmlns:r="http://schemas.openxmlformats.org/officeDocument/2006/relationships" xmlns:p="http://schemas.openxmlformats.org/presentationml/2006/main">
+  <p:cSld>
+    <p:spTree>
+      <p:nvGrpSpPr>
+        <p:cNvPr id="1" name=""/>
+        <p:cNvGrpSpPr/>
+        <p:nvPr/>
+      </p:nvGrpSpPr>
+      <p:grpSpPr>
+        <a:xfrm>
+          <a:off x="0" y="0"/>
+          <a:ext cx="0" cy="0"/>
+          <a:chOff x="0" y="0"/>
+          <a:chExt cx="0" cy="0"/>
+        </a:xfrm>
+      </p:grpSpPr>
+      <p:sp>
+        <p:nvSpPr>
+          <p:cNvPr id="2" name="Title 1"/>
+          <p:cNvSpPr>
+            <a:spLocks noGrp="1"/>
+          </p:cNvSpPr>
+          <p:nvPr>
+            <p:ph type="title"/>
+          </p:nvPr>
+        </p:nvSpPr>
+        <p:spPr/>
+        <p:txBody>
+          <a:bodyPr/>
+          <a:lstStyle/>
+          <a:p>
+            <a:r>
+              <a:t>Data privacy — easyEXPRESS itself</a:t>
+            </a:r>
+          </a:p>
+        </p:txBody>
+      </p:sp>
+      <p:sp>
+        <p:nvSpPr>
+          <p:cNvPr id="3" name="Content Placeholder 2"/>
+          <p:cNvSpPr>
+            <a:spLocks noGrp="1"/>
+          </p:cNvSpPr>
+          <p:nvPr>
+            <p:ph idx="1"/>
+          </p:nvPr>
+        </p:nvSpPr>
+        <p:spPr>
+          <a:xfrm>
+            <a:off x="822960" y="1847088"/>
+            <a:ext cx="7543800" cy="4023360"/>
+          </a:xfrm>
+        </p:spPr>
+        <p:txBody>
+          <a:bodyPr/>
+          <a:lstStyle/>
+          <a:p>
+            <a:r>
+              <a:rPr sz="1800"/>
+              <a:t>Zero outbound network calls — verifiable three ways:</a:t>
+            </a:r>
+          </a:p>
+          <a:p>
+            <a:pPr lvl="1"/>
+            <a:r>
+              <a:rPr sz="1500"/>
+              <a:t>Webview CSP connect-src 'none' (Chromium refuses fetch/XHR/WebSocket).</a:t>
+            </a:r>
+          </a:p>
+          <a:p>
+            <a:pPr lvl="1"/>
+            <a:r>
+              <a:rPr sz="1500"/>
+              <a:t>No fetch, no http(s) require, no telemetry SDK in the extension host.</a:t>
+            </a:r>
+          </a:p>
+          <a:p>
+            <a:pPr lvl="1"/>
+            <a:r>
+              <a:rPr sz="1500"/>
+              <a:t>$ grep -rE 'fetch\(|require\(.https?.\)' src/  →  empty.</a:t>
+            </a:r>
+          </a:p>
+          <a:p>
+            <a:r>
+              <a:rPr sz="1800"/>
+              <a:t>Plurimath and MathJax workers never make network calls in our usage.</a:t>
+            </a:r>
+          </a:p>
+          <a:p>
+            <a:r>
+              <a:rPr sz="1800"/>
+              <a:t>Vendor packages pinned to exact versions; npm audit clean.</a:t>
+            </a:r>
+          </a:p>
+        </p:txBody>
+      </p:sp>
+    </p:spTree>
+  </p:cSld>
+  <p:clrMapOvr>
+    <a:masterClrMapping/>
+  </p:clrMapOvr>
+</p:sld>
+</file>
+
+<file path=ppt/slides/slide14.xml><?xml version="1.0" encoding="utf-8"?>
+<p:sld xmlns:a="http://schemas.openxmlformats.org/drawingml/2006/main" xmlns:r="http://schemas.openxmlformats.org/officeDocument/2006/relationships" xmlns:p="http://schemas.openxmlformats.org/presentationml/2006/main">
+  <p:cSld>
+    <p:spTree>
+      <p:nvGrpSpPr>
+        <p:cNvPr id="1" name=""/>
+        <p:cNvGrpSpPr/>
+        <p:nvPr/>
+      </p:nvGrpSpPr>
+      <p:grpSpPr>
+        <a:xfrm>
+          <a:off x="0" y="0"/>
+          <a:ext cx="0" cy="0"/>
+          <a:chOff x="0" y="0"/>
+          <a:chExt cx="0" cy="0"/>
+        </a:xfrm>
+      </p:grpSpPr>
+      <p:sp>
+        <p:nvSpPr>
+          <p:cNvPr id="2" name="Title 1"/>
+          <p:cNvSpPr>
+            <a:spLocks noGrp="1"/>
+          </p:cNvSpPr>
+          <p:nvPr>
+            <p:ph type="title"/>
+          </p:nvPr>
+        </p:nvSpPr>
+        <p:spPr/>
+        <p:txBody>
+          <a:bodyPr/>
+          <a:lstStyle/>
+          <a:p>
+            <a:r>
+              <a:t>Data privacy — Copilot Chat is in the same window</a:t>
+            </a:r>
+          </a:p>
+        </p:txBody>
+      </p:sp>
+      <p:sp>
+        <p:nvSpPr>
+          <p:cNvPr id="3" name="Content Placeholder 2"/>
+          <p:cNvSpPr>
+            <a:spLocks noGrp="1"/>
+          </p:cNvSpPr>
+          <p:nvPr>
+            <p:ph idx="1"/>
+          </p:nvPr>
+        </p:nvSpPr>
+        <p:spPr>
+          <a:xfrm>
+            <a:off x="822960" y="1847088"/>
+            <a:ext cx="7543800" cy="4023360"/>
+          </a:xfrm>
+        </p:spPr>
+        <p:txBody>
+          <a:bodyPr/>
+          <a:lstStyle/>
+          <a:p>
+            <a:r>
+              <a:rPr sz="1800"/>
+              <a:t>VS Code Insiders ships GitHub Copilot Chat as a built-in feature.</a:t>
+            </a:r>
+          </a:p>
+          <a:p>
+            <a:pPr lvl="1"/>
+            <a:r>
+              <a:rPr sz="1500"/>
+              <a:t>--disable-extensions does NOT remove it.</a:t>
+            </a:r>
+          </a:p>
+          <a:p>
+            <a:r>
+              <a:rPr sz="1800"/>
+              <a:t>Explain / Add File to Chat / Open Inline Chat / Review send to GitHub/MS:</a:t>
+            </a:r>
+          </a:p>
+          <a:p>
+            <a:pPr lvl="1"/>
+            <a:r>
+              <a:rPr sz="1500"/>
+              <a:t>Cursor word + enclosing scope (via DocumentSymbolProvider).</a:t>
+            </a:r>
+          </a:p>
+          <a:p>
+            <a:pPr lvl="1"/>
+            <a:r>
+              <a:rPr sz="1500"/>
+              <a:t>Surrounding ±N source lines (typically 20–50).</a:t>
+            </a:r>
+          </a:p>
+          <a:p>
+            <a:pPr lvl="1"/>
+            <a:r>
+              <a:rPr sz="1500"/>
+              <a:t>Snippets from other open editors (with default useProjectContext).</a:t>
+            </a:r>
+          </a:p>
+        </p:txBody>
+      </p:sp>
+    </p:spTree>
+  </p:cSld>
+  <p:clrMapOvr>
+    <a:masterClrMapping/>
+  </p:clrMapOvr>
+</p:sld>
+</file>
+
+<file path=ppt/slides/slide15.xml><?xml version="1.0" encoding="utf-8"?>
+<p:sld xmlns:a="http://schemas.openxmlformats.org/drawingml/2006/main" xmlns:r="http://schemas.openxmlformats.org/officeDocument/2006/relationships" xmlns:p="http://schemas.openxmlformats.org/presentationml/2006/main">
+  <p:cSld>
+    <p:spTree>
+      <p:nvGrpSpPr>
+        <p:cNvPr id="1" name=""/>
+        <p:cNvGrpSpPr/>
+        <p:nvPr/>
+      </p:nvGrpSpPr>
+      <p:grpSpPr>
+        <a:xfrm>
+          <a:off x="0" y="0"/>
+          <a:ext cx="0" cy="0"/>
+          <a:chOff x="0" y="0"/>
+          <a:chExt cx="0" cy="0"/>
+        </a:xfrm>
+      </p:grpSpPr>
+      <p:sp>
+        <p:nvSpPr>
+          <p:cNvPr id="2" name="Title 1"/>
+          <p:cNvSpPr>
+            <a:spLocks noGrp="1"/>
+          </p:cNvSpPr>
+          <p:nvPr>
+            <p:ph type="title"/>
+          </p:nvPr>
+        </p:nvSpPr>
+        <p:spPr/>
+        <p:txBody>
+          <a:bodyPr/>
+          <a:lstStyle/>
+          <a:p>
+            <a:r>
+              <a:t>Data privacy — mitigations for pre-publication work</a:t>
+            </a:r>
+          </a:p>
+        </p:txBody>
+      </p:sp>
+      <p:sp>
+        <p:nvSpPr>
+          <p:cNvPr id="3" name="Content Placeholder 2"/>
+          <p:cNvSpPr>
+            <a:spLocks noGrp="1"/>
+          </p:cNvSpPr>
+          <p:nvPr>
+            <p:ph idx="1"/>
+          </p:nvPr>
+        </p:nvSpPr>
+        <p:spPr>
+          <a:xfrm>
+            <a:off x="822960" y="1847088"/>
+            <a:ext cx="7543800" cy="4023360"/>
+          </a:xfrm>
+        </p:spPr>
+        <p:txBody>
+          <a:bodyPr/>
+          <a:lstStyle/>
+          <a:p>
+            <a:r>
+              <a:rPr sz="1800"/>
+              <a:t>Sign out of GitHub in the affected VS Code window.</a:t>
+            </a:r>
+          </a:p>
+          <a:p>
+            <a:pPr lvl="1"/>
+            <a:r>
+              <a:rPr sz="1500"/>
+              <a:t>Account icon, bottom-left → Sign Out.</a:t>
+            </a:r>
+          </a:p>
+          <a:p>
+            <a:pPr lvl="1"/>
+            <a:r>
+              <a:rPr sz="1500"/>
+              <a:t>Without auth, Copilot Chat cannot reach its API.</a:t>
+            </a:r>
+          </a:p>
+          <a:p>
+            <a:r>
+              <a:rPr sz="1800"/>
+              <a:t>Set chat.disableAIFeatures: true in workspace settings.</a:t>
+            </a:r>
+          </a:p>
+          <a:p>
+            <a:pPr lvl="1"/>
+            <a:r>
+              <a:rPr sz="1500"/>
+              <a:t>Hard switch in recent VS Code releases.</a:t>
+            </a:r>
+          </a:p>
+          <a:p>
+            <a:r>
+              <a:rPr sz="1800"/>
+              <a:t>Best practice: a separate, signed-out window for any sensitive standards work.</a:t>
+            </a:r>
+          </a:p>
+        </p:txBody>
+      </p:sp>
+    </p:spTree>
+  </p:cSld>
+  <p:clrMapOvr>
+    <a:masterClrMapping/>
+  </p:clrMapOvr>
+</p:sld>
+</file>
+
+<file path=ppt/slides/slide16.xml><?xml version="1.0" encoding="utf-8"?>
+<p:sld xmlns:a="http://schemas.openxmlformats.org/drawingml/2006/main" xmlns:r="http://schemas.openxmlformats.org/officeDocument/2006/relationships" xmlns:p="http://schemas.openxmlformats.org/presentationml/2006/main">
+  <p:cSld>
+    <p:spTree>
+      <p:nvGrpSpPr>
+        <p:cNvPr id="1" name=""/>
+        <p:cNvGrpSpPr/>
+        <p:nvPr/>
+      </p:nvGrpSpPr>
+      <p:grpSpPr>
+        <a:xfrm>
+          <a:off x="0" y="0"/>
+          <a:ext cx="0" cy="0"/>
+          <a:chOff x="0" y="0"/>
+          <a:chExt cx="0" cy="0"/>
+        </a:xfrm>
+      </p:grpSpPr>
+      <p:sp>
+        <p:nvSpPr>
+          <p:cNvPr id="2" name="Title 1"/>
+          <p:cNvSpPr>
+            <a:spLocks noGrp="1"/>
+          </p:cNvSpPr>
+          <p:nvPr>
+            <p:ph type="title"/>
+          </p:nvPr>
+        </p:nvSpPr>
+        <p:spPr/>
+        <p:txBody>
+          <a:bodyPr/>
+          <a:lstStyle/>
+          <a:p>
+            <a:r>
+              <a:t>Performance — instrumentation</a:t>
+            </a:r>
+          </a:p>
+        </p:txBody>
+      </p:sp>
+      <p:sp>
+        <p:nvSpPr>
+          <p:cNvPr id="3" name="Content Placeholder 2"/>
+          <p:cNvSpPr>
+            <a:spLocks noGrp="1"/>
+          </p:cNvSpPr>
+          <p:nvPr>
+            <p:ph idx="1"/>
+          </p:nvPr>
+        </p:nvSpPr>
+        <p:spPr>
+          <a:xfrm>
+            <a:off x="822960" y="1847088"/>
+            <a:ext cx="7543800" cy="4023360"/>
+          </a:xfrm>
+        </p:spPr>
+        <p:txBody>
+          <a:bodyPr/>
+          <a:lstStyle/>
+          <a:p>
+            <a:r>
+              <a:rPr sz="1800"/>
+              <a:t>Every user-facing path wrapped with perf.time(label).</a:t>
+            </a:r>
+          </a:p>
+          <a:p>
+            <a:r>
+              <a:rPr sz="1800"/>
+              <a:t>Logs to OutputChannel "easyEXPRESS Viewers" with timestamp.</a:t>
+            </a:r>
+          </a:p>
+          <a:p>
+            <a:r>
+              <a:rPr sz="1800"/>
+              <a:t>Each path has a threshold; over-budget renders flag "⚠ over budget".</a:t>
+            </a:r>
+          </a:p>
+          <a:p>
+            <a:r>
+              <a:rPr sz="1800"/>
+              <a:t>Smoke-test checklist captures numbers automatically (docs/smoke-test-checklist.md).</a:t>
+            </a:r>
+          </a:p>
+        </p:txBody>
+      </p:sp>
+    </p:spTree>
+  </p:cSld>
+  <p:clrMapOvr>
+    <a:masterClrMapping/>
+  </p:clrMapOvr>
+</p:sld>
+</file>
+
+<file path=ppt/slides/slide17.xml><?xml version="1.0" encoding="utf-8"?>
+<p:sld xmlns:a="http://schemas.openxmlformats.org/drawingml/2006/main" xmlns:r="http://schemas.openxmlformats.org/officeDocument/2006/relationships" xmlns:p="http://schemas.openxmlformats.org/presentationml/2006/main">
+  <p:cSld>
+    <p:spTree>
+      <p:nvGrpSpPr>
+        <p:cNvPr id="1" name=""/>
+        <p:cNvGrpSpPr/>
+        <p:nvPr/>
+      </p:nvGrpSpPr>
+      <p:grpSpPr>
+        <a:xfrm>
+          <a:off x="0" y="0"/>
+          <a:ext cx="0" cy="0"/>
+          <a:chOff x="0" y="0"/>
+          <a:chExt cx="0" cy="0"/>
+        </a:xfrm>
+      </p:grpSpPr>
+      <p:sp>
+        <p:nvSpPr>
+          <p:cNvPr id="2" name="Title 1"/>
+          <p:cNvSpPr>
+            <a:spLocks noGrp="1"/>
+          </p:cNvSpPr>
+          <p:nvPr>
+            <p:ph type="title"/>
+          </p:nvPr>
+        </p:nvSpPr>
+        <p:spPr/>
+        <p:txBody>
+          <a:bodyPr/>
+          <a:lstStyle/>
+          <a:p>
+            <a:r>
+              <a:t>Performance — warm baselines</a:t>
+            </a:r>
+          </a:p>
+        </p:txBody>
+      </p:sp>
+      <p:sp>
+        <p:nvSpPr>
+          <p:cNvPr id="3" name="Content Placeholder 2"/>
+          <p:cNvSpPr>
+            <a:spLocks noGrp="1"/>
+          </p:cNvSpPr>
+          <p:nvPr>
+            <p:ph idx="1"/>
+          </p:nvPr>
+        </p:nvSpPr>
+        <p:spPr>
+          <a:xfrm>
+            <a:off x="822960" y="1847088"/>
+            <a:ext cx="7543800" cy="4023360"/>
+          </a:xfrm>
+        </p:spPr>
+        <p:txBody>
+          <a:bodyPr/>
+          <a:lstStyle/>
+          <a:p>
+            <a:r>
+              <a:rPr sz="1800"/>
+              <a:t>Geometry_schema corpus, warm machine:</a:t>
+            </a:r>
+          </a:p>
+          <a:p>
+            <a:pPr lvl="1"/>
+            <a:r>
+              <a:rPr sz="1500"/>
+              <a:t>activate: ≤ 500 ms / 1 500 ms warn threshold</a:t>
+            </a:r>
+          </a:p>
+          <a:p>
+            <a:pPr lvl="1"/>
+            <a:r>
+              <a:rPr sz="1500"/>
+              <a:t>hover warm: ~50 ms / first-with-math: ~180 ms</a:t>
+            </a:r>
+          </a:p>
+          <a:p>
+            <a:pPr lvl="1"/>
+            <a:r>
+              <a:rPr sz="1500"/>
+              <a:t>showDescription: ~600 ms first / ~200 ms warm</a:t>
+            </a:r>
+          </a:p>
+          <a:p>
+            <a:pPr lvl="1"/>
+            <a:r>
+              <a:rPr sz="1500"/>
+              <a:t>showExpressG: ~400 ms</a:t>
+            </a:r>
+          </a:p>
+          <a:p>
+            <a:pPr lvl="1"/>
+            <a:r>
+              <a:rPr sz="1500"/>
+              <a:t>math playground render: ≤ 200 ms</a:t>
+            </a:r>
+          </a:p>
+        </p:txBody>
+      </p:sp>
+    </p:spTree>
+  </p:cSld>
+  <p:clrMapOvr>
+    <a:masterClrMapping/>
+  </p:clrMapOvr>
+</p:sld>
+</file>
+
+<file path=ppt/slides/slide18.xml><?xml version="1.0" encoding="utf-8"?>
+<p:sld xmlns:a="http://schemas.openxmlformats.org/drawingml/2006/main" xmlns:r="http://schemas.openxmlformats.org/officeDocument/2006/relationships" xmlns:p="http://schemas.openxmlformats.org/presentationml/2006/main">
+  <p:cSld>
+    <p:spTree>
+      <p:nvGrpSpPr>
+        <p:cNvPr id="1" name=""/>
+        <p:cNvGrpSpPr/>
+        <p:nvPr/>
+      </p:nvGrpSpPr>
+      <p:grpSpPr>
+        <a:xfrm>
+          <a:off x="0" y="0"/>
+          <a:ext cx="0" cy="0"/>
+          <a:chOff x="0" y="0"/>
+          <a:chExt cx="0" cy="0"/>
+        </a:xfrm>
+      </p:grpSpPr>
+      <p:sp>
+        <p:nvSpPr>
+          <p:cNvPr id="2" name="Title 1"/>
+          <p:cNvSpPr>
+            <a:spLocks noGrp="1"/>
+          </p:cNvSpPr>
+          <p:nvPr>
+            <p:ph type="title"/>
+          </p:nvPr>
+        </p:nvSpPr>
+        <p:spPr/>
+        <p:txBody>
+          <a:bodyPr/>
+          <a:lstStyle/>
+          <a:p>
+            <a:r>
+              <a:t>Performance — bundle and packaging</a:t>
+            </a:r>
+          </a:p>
+        </p:txBody>
+      </p:sp>
+      <p:sp>
+        <p:nvSpPr>
+          <p:cNvPr id="3" name="Content Placeholder 2"/>
+          <p:cNvSpPr>
+            <a:spLocks noGrp="1"/>
+          </p:cNvSpPr>
+          <p:nvPr>
+            <p:ph idx="1"/>
+          </p:nvPr>
+        </p:nvSpPr>
+        <p:spPr>
+          <a:xfrm>
+            <a:off x="822960" y="1847088"/>
+            <a:ext cx="7543800" cy="4023360"/>
+          </a:xfrm>
+        </p:spPr>
+        <p:txBody>
+          <a:bodyPr/>
+          <a:lstStyle/>
+          <a:p>
+            <a:r>
+              <a:rPr sz="1800"/>
+              <a:t>Extension host bundle: 780 KB</a:t>
+            </a:r>
+          </a:p>
+          <a:p>
+            <a:r>
+              <a:rPr sz="1800"/>
+              <a:t>Language server bundle: 1.7 MB</a:t>
+            </a:r>
+          </a:p>
+          <a:p>
+            <a:r>
+              <a:rPr sz="1800"/>
+              <a:t>Webview vendor assets: 3.9 MB</a:t>
+            </a:r>
+          </a:p>
+          <a:p>
+            <a:r>
+              <a:rPr sz="1800"/>
+              <a:t>.vsix: 8.3 MB / 195 files (well under 100 MB marketplace cap)</a:t>
+            </a:r>
+          </a:p>
+          <a:p>
+            <a:r>
+              <a:rPr sz="1800"/>
+              <a:t>@plurimath/plurimath and mathjax shipped from node_modules at runtime.</a:t>
+            </a:r>
+          </a:p>
+        </p:txBody>
+      </p:sp>
+    </p:spTree>
+  </p:cSld>
+  <p:clrMapOvr>
+    <a:masterClrMapping/>
+  </p:clrMapOvr>
+</p:sld>
+</file>
+
+<file path=ppt/slides/slide19.xml><?xml version="1.0" encoding="utf-8"?>
+<p:sld xmlns:a="http://schemas.openxmlformats.org/drawingml/2006/main" xmlns:r="http://schemas.openxmlformats.org/officeDocument/2006/relationships" xmlns:p="http://schemas.openxmlformats.org/presentationml/2006/main">
+  <p:cSld>
+    <p:spTree>
+      <p:nvGrpSpPr>
+        <p:cNvPr id="1" name=""/>
+        <p:cNvGrpSpPr/>
+        <p:nvPr/>
+      </p:nvGrpSpPr>
+      <p:grpSpPr>
+        <a:xfrm>
+          <a:off x="0" y="0"/>
+          <a:ext cx="0" cy="0"/>
+          <a:chOff x="0" y="0"/>
+          <a:chExt cx="0" cy="0"/>
+        </a:xfrm>
+      </p:grpSpPr>
+      <p:sp>
+        <p:nvSpPr>
+          <p:cNvPr id="2" name="Title 1"/>
+          <p:cNvSpPr>
+            <a:spLocks noGrp="1"/>
+          </p:cNvSpPr>
+          <p:nvPr>
+            <p:ph type="title"/>
+          </p:nvPr>
+        </p:nvSpPr>
+        <p:spPr/>
+        <p:txBody>
+          <a:bodyPr/>
+          <a:lstStyle/>
+          <a:p>
+            <a:r>
+              <a:t>Installation and first use</a:t>
+            </a:r>
+          </a:p>
+        </p:txBody>
+      </p:sp>
+      <p:sp>
+        <p:nvSpPr>
+          <p:cNvPr id="3" name="Content Placeholder 2"/>
+          <p:cNvSpPr>
+            <a:spLocks noGrp="1"/>
+          </p:cNvSpPr>
+          <p:nvPr>
+            <p:ph idx="1"/>
+          </p:nvPr>
+        </p:nvSpPr>
+        <p:spPr>
+          <a:xfrm>
+            <a:off x="822960" y="1847088"/>
+            <a:ext cx="7543800" cy="4023360"/>
+          </a:xfrm>
+        </p:spPr>
+        <p:txBody>
+          <a:bodyPr/>
+          <a:lstStyle/>
+          <a:p>
+            <a:r>
+              <a:rPr sz="1800"/>
+              <a:t>Install: $ code --install-extension easyexpress-0.4.0.vsix</a:t>
+            </a:r>
+          </a:p>
+          <a:p>
+            <a:r>
+              <a:rPr sz="1800"/>
+              <a:t>Reload VS Code; open a wg12-step .exp file.</a:t>
+            </a:r>
+          </a:p>
+          <a:p>
+            <a:r>
+              <a:rPr sz="1800"/>
+              <a:t>Hover any entity → MarkdownString popup with description, links, math.</a:t>
+            </a:r>
+          </a:p>
+          <a:p>
+            <a:r>
+              <a:rPr sz="1800"/>
+              <a:t>Right-click → Show Description → opens webview beside editor.</a:t>
+            </a:r>
+          </a:p>
+          <a:p>
+            <a:r>
+              <a:rPr sz="1800"/>
+              <a:t>Right-click → Show EXPRESS-G Diagram → narrowed picker → click hot-spots.</a:t>
+            </a:r>
+          </a:p>
+          <a:p>
+            <a:r>
+              <a:rPr sz="1800"/>
+              <a:t>Cmd+Shift+P → "Open AsciiMath Playground" → live math editor.</a:t>
+            </a:r>
+          </a:p>
+          <a:p>
+            <a:r>
+              <a:rPr sz="1800"/>
+              <a:t>Output panel → "easyEXPRESS Viewers" → see [perf] timings + diagnostic logs.</a:t>
             </a:r>
           </a:p>
         </p:txBody>
@@ -3501,7 +4666,7 @@
 </file>
 
 <file path=ppt/slides/slide2.xml><?xml version="1.0" encoding="utf-8"?>
-<p:sld xmlns:a="http://schemas.openxmlformats.org/drawingml/2006/main" xmlns:p="http://schemas.openxmlformats.org/presentationml/2006/main" xmlns:r="http://schemas.openxmlformats.org/officeDocument/2006/relationships">
+<p:sld xmlns:a="http://schemas.openxmlformats.org/drawingml/2006/main" xmlns:r="http://schemas.openxmlformats.org/officeDocument/2006/relationships" xmlns:p="http://schemas.openxmlformats.org/presentationml/2006/main">
   <p:cSld>
     <p:spTree>
       <p:nvGrpSpPr>
@@ -3509,7 +4674,14 @@
         <p:cNvGrpSpPr/>
         <p:nvPr/>
       </p:nvGrpSpPr>
-      <p:grpSpPr/>
+      <p:grpSpPr>
+        <a:xfrm>
+          <a:off x="0" y="0"/>
+          <a:ext cx="0" cy="0"/>
+          <a:chOff x="0" y="0"/>
+          <a:chExt cx="0" cy="0"/>
+        </a:xfrm>
+      </p:grpSpPr>
       <p:sp>
         <p:nvSpPr>
           <p:cNvPr id="2" name="Title 1"/>
@@ -3526,7 +4698,7 @@
           <a:lstStyle/>
           <a:p>
             <a:r>
-              <a:t>The gap before 0.4.0</a:t>
+              <a:t>The status before 0.4.0</a:t>
             </a:r>
           </a:p>
         </p:txBody>
@@ -3551,51 +4723,261 @@
           <a:bodyPr/>
           <a:lstStyle/>
           <a:p>
-            <a:pPr/>
-            <a:r>
+            <a:r>
+              <a:rPr sz="1800"/>
               <a:t>Authors edit annotated EXPRESS in VS Code; render via Metanorma toolchain.</a:t>
             </a:r>
           </a:p>
           <a:p>
-            <a:pPr/>
-            <a:r>
+            <a:r>
+              <a:rPr sz="1800"/>
               <a:t>In the editor itself, the annotations are invisible:</a:t>
             </a:r>
           </a:p>
           <a:p>
             <a:pPr lvl="1"/>
             <a:r>
+              <a:rPr sz="1500"/>
               <a:t>Hovering on point shows the bare ENTITY declaration with no description.</a:t>
             </a:r>
           </a:p>
           <a:p>
             <a:pPr lvl="1"/>
             <a:r>
+              <a:rPr sz="1500"/>
               <a:t>Embedded math (stem:[RR^m]) appears as raw source text.</a:t>
             </a:r>
           </a:p>
           <a:p>
             <a:pPr lvl="1"/>
             <a:r>
-              <a:t>Cross-references render as &lt;&lt;express:geometry_schema.cartesian_point&gt;&gt;, not links.</a:t>
+              <a:rPr sz="1500"/>
+              <a:t>Cross-references render as &lt;&lt;express:…&gt;&gt;, not links.</a:t>
             </a:r>
           </a:p>
           <a:p>
             <a:pPr lvl="1"/>
             <a:r>
+              <a:rPr sz="1500"/>
               <a:t>EXPRESS-G diagrams stored alongside .exp files appear as XML when opened.</a:t>
             </a:r>
           </a:p>
           <a:p>
-            <a:pPr/>
-            <a:r>
+            <a:r>
+              <a:rPr sz="1800"/>
               <a:t>Author–publish loop: edit, save, run Metanorma, look at HTML/PDF, return to editor.</a:t>
             </a:r>
           </a:p>
-          <a:p>
-            <a:pPr/>
-            <a:r>
-              <a:t>0.4.0 closes this gap with four viewer surfaces inside VS Code itself.</a:t>
+        </p:txBody>
+      </p:sp>
+    </p:spTree>
+  </p:cSld>
+  <p:clrMapOvr>
+    <a:masterClrMapping/>
+  </p:clrMapOvr>
+</p:sld>
+</file>
+
+<file path=ppt/slides/slide20.xml><?xml version="1.0" encoding="utf-8"?>
+<p:sld xmlns:a="http://schemas.openxmlformats.org/drawingml/2006/main" xmlns:r="http://schemas.openxmlformats.org/officeDocument/2006/relationships" xmlns:p="http://schemas.openxmlformats.org/presentationml/2006/main">
+  <p:cSld>
+    <p:spTree>
+      <p:nvGrpSpPr>
+        <p:cNvPr id="1" name=""/>
+        <p:cNvGrpSpPr/>
+        <p:nvPr/>
+      </p:nvGrpSpPr>
+      <p:grpSpPr>
+        <a:xfrm>
+          <a:off x="0" y="0"/>
+          <a:ext cx="0" cy="0"/>
+          <a:chOff x="0" y="0"/>
+          <a:chExt cx="0" cy="0"/>
+        </a:xfrm>
+      </p:grpSpPr>
+      <p:sp>
+        <p:nvSpPr>
+          <p:cNvPr id="2" name="Title 1"/>
+          <p:cNvSpPr>
+            <a:spLocks noGrp="1"/>
+          </p:cNvSpPr>
+          <p:nvPr>
+            <p:ph type="title"/>
+          </p:nvPr>
+        </p:nvSpPr>
+        <p:spPr/>
+        <p:txBody>
+          <a:bodyPr/>
+          <a:lstStyle/>
+          <a:p>
+            <a:r>
+              <a:t>Roadmap</a:t>
+            </a:r>
+          </a:p>
+        </p:txBody>
+      </p:sp>
+      <p:sp>
+        <p:nvSpPr>
+          <p:cNvPr id="3" name="Content Placeholder 2"/>
+          <p:cNvSpPr>
+            <a:spLocks noGrp="1"/>
+          </p:cNvSpPr>
+          <p:nvPr>
+            <p:ph idx="1"/>
+          </p:nvPr>
+        </p:nvSpPr>
+        <p:spPr>
+          <a:xfrm>
+            <a:off x="822960" y="1847088"/>
+            <a:ext cx="7543800" cy="4023360"/>
+          </a:xfrm>
+        </p:spPr>
+        <p:txBody>
+          <a:bodyPr/>
+          <a:lstStyle/>
+          <a:p>
+            <a:r>
+              <a:rPr sz="1800"/>
+              <a:t>Block-form math: [stem]/[asciimath]/[latexmath] open-blocks.</a:t>
+            </a:r>
+          </a:p>
+          <a:p>
+            <a:r>
+              <a:rPr sz="1800"/>
+              <a:t>EXPRESS-G as customEditor: "Reopen with EXPRESS-G Viewer" on any .svg.</a:t>
+            </a:r>
+          </a:p>
+          <a:p>
+            <a:r>
+              <a:rPr sz="1800"/>
+              <a:t>Performance under very large schemas: incremental annotation index.</a:t>
+            </a:r>
+          </a:p>
+          <a:p>
+            <a:r>
+              <a:rPr sz="1800"/>
+              <a:t>Cross-extension API: delegate to upstream asciidoctor-vscode if API published.</a:t>
+            </a:r>
+          </a:p>
+          <a:p>
+            <a:r>
+              <a:rPr sz="1800"/>
+              <a:t>Cross-platform smoke runs: macOS done; Linux / Windows pending.</a:t>
+            </a:r>
+          </a:p>
+          <a:p>
+            <a:r>
+              <a:rPr sz="1800"/>
+              <a:t>Phase-4 deliverables: this deck + companion white paper.</a:t>
+            </a:r>
+          </a:p>
+        </p:txBody>
+      </p:sp>
+    </p:spTree>
+  </p:cSld>
+  <p:clrMapOvr>
+    <a:masterClrMapping/>
+  </p:clrMapOvr>
+</p:sld>
+</file>
+
+<file path=ppt/slides/slide21.xml><?xml version="1.0" encoding="utf-8"?>
+<p:sld xmlns:a="http://schemas.openxmlformats.org/drawingml/2006/main" xmlns:r="http://schemas.openxmlformats.org/officeDocument/2006/relationships" xmlns:p="http://schemas.openxmlformats.org/presentationml/2006/main">
+  <p:cSld>
+    <p:spTree>
+      <p:nvGrpSpPr>
+        <p:cNvPr id="1" name=""/>
+        <p:cNvGrpSpPr/>
+        <p:nvPr/>
+      </p:nvGrpSpPr>
+      <p:grpSpPr>
+        <a:xfrm>
+          <a:off x="0" y="0"/>
+          <a:ext cx="0" cy="0"/>
+          <a:chOff x="0" y="0"/>
+          <a:chExt cx="0" cy="0"/>
+        </a:xfrm>
+      </p:grpSpPr>
+      <p:sp>
+        <p:nvSpPr>
+          <p:cNvPr id="2" name="Title 1"/>
+          <p:cNvSpPr>
+            <a:spLocks noGrp="1"/>
+          </p:cNvSpPr>
+          <p:nvPr>
+            <p:ph type="title"/>
+          </p:nvPr>
+        </p:nvSpPr>
+        <p:spPr/>
+        <p:txBody>
+          <a:bodyPr/>
+          <a:lstStyle/>
+          <a:p>
+            <a:r>
+              <a:t>Questions and contact</a:t>
+            </a:r>
+          </a:p>
+        </p:txBody>
+      </p:sp>
+      <p:sp>
+        <p:nvSpPr>
+          <p:cNvPr id="3" name="Content Placeholder 2"/>
+          <p:cNvSpPr>
+            <a:spLocks noGrp="1"/>
+          </p:cNvSpPr>
+          <p:nvPr>
+            <p:ph idx="1"/>
+          </p:nvPr>
+        </p:nvSpPr>
+        <p:spPr>
+          <a:xfrm>
+            <a:off x="822960" y="1847088"/>
+            <a:ext cx="7543800" cy="4023360"/>
+          </a:xfrm>
+        </p:spPr>
+        <p:txBody>
+          <a:bodyPr/>
+          <a:lstStyle/>
+          <a:p>
+            <a:r>
+              <a:rPr sz="1800"/>
+              <a:t>Project repository: github.com/TRThurman/easy-express-mirror</a:t>
+            </a:r>
+          </a:p>
+          <a:p>
+            <a:r>
+              <a:rPr sz="1800"/>
+              <a:t>Upstream: usnistgov/easy-express  (NIST)</a:t>
+            </a:r>
+          </a:p>
+          <a:p>
+            <a:r>
+              <a:rPr sz="1800"/>
+              <a:t>Issue tracker: github.com/TRThurman/easy-express-mirror/issues</a:t>
+            </a:r>
+          </a:p>
+          <a:p>
+            <a:r>
+              <a:rPr sz="1800"/>
+              <a:t>Maintainer: Thomas Thurman · thomas@trthurman.consulting</a:t>
+            </a:r>
+          </a:p>
+          <a:p>
+            <a:r>
+              <a:rPr sz="1800"/>
+              <a:t>Companion white paper: docs/easyEXPRESS-viewers.adoc</a:t>
+            </a:r>
+          </a:p>
+          <a:p>
+            <a:r>
+              <a:rPr sz="1800"/>
+              <a:t>Design protocol document: DESIGN-viewers-integration.md</a:t>
+            </a:r>
+          </a:p>
+          <a:p>
+            <a:r>
+              <a:rPr sz="1800"/>
+              <a:t>Smoke-test checklist: docs/smoke-test-checklist.md</a:t>
             </a:r>
           </a:p>
         </p:txBody>
@@ -3609,7 +4991,7 @@
 </file>
 
 <file path=ppt/slides/slide3.xml><?xml version="1.0" encoding="utf-8"?>
-<p:sld xmlns:a="http://schemas.openxmlformats.org/drawingml/2006/main" xmlns:p="http://schemas.openxmlformats.org/presentationml/2006/main" xmlns:r="http://schemas.openxmlformats.org/officeDocument/2006/relationships">
+<p:sld xmlns:a="http://schemas.openxmlformats.org/drawingml/2006/main" xmlns:r="http://schemas.openxmlformats.org/officeDocument/2006/relationships" xmlns:p="http://schemas.openxmlformats.org/presentationml/2006/main">
   <p:cSld>
     <p:spTree>
       <p:nvGrpSpPr>
@@ -3617,7 +4999,14 @@
         <p:cNvGrpSpPr/>
         <p:nvPr/>
       </p:nvGrpSpPr>
-      <p:grpSpPr/>
+      <p:grpSpPr>
+        <a:xfrm>
+          <a:off x="0" y="0"/>
+          <a:ext cx="0" cy="0"/>
+          <a:chOff x="0" y="0"/>
+          <a:chExt cx="0" cy="0"/>
+        </a:xfrm>
+      </p:grpSpPr>
       <p:sp>
         <p:nvSpPr>
           <p:cNvPr id="2" name="Title 1"/>
@@ -3659,57 +5048,29 @@
           <a:bodyPr/>
           <a:lstStyle/>
           <a:p>
-            <a:pPr/>
-            <a:r>
+            <a:r>
+              <a:rPr sz="1800"/>
               <a:t>Hover (MarkdownString)</a:t>
             </a:r>
           </a:p>
           <a:p>
             <a:pPr lvl="1"/>
             <a:r>
+              <a:rPr sz="1500"/>
               <a:t>Truncated description with rendered xref command-links and inline math glyphs.</a:t>
             </a:r>
           </a:p>
           <a:p>
-            <a:pPr/>
-            <a:r>
+            <a:r>
+              <a:rPr sz="1800"/>
               <a:t>Description preview (WebviewPanel)</a:t>
             </a:r>
           </a:p>
           <a:p>
             <a:pPr lvl="1"/>
             <a:r>
+              <a:rPr sz="1500"/>
               <a:t>Full Asciidoctor render with embedded MathML; same fidelity as Metanorma.</a:t>
-            </a:r>
-          </a:p>
-          <a:p>
-            <a:pPr/>
-            <a:r>
-              <a:t>EXPRESS-G interactive viewer (WebviewPanel)</a:t>
-            </a:r>
-          </a:p>
-          <a:p>
-            <a:pPr lvl="1"/>
-            <a:r>
-              <a:t>Click any labelled box; jumps to the entity's source declaration.</a:t>
-            </a:r>
-          </a:p>
-          <a:p>
-            <a:pPr/>
-            <a:r>
-              <a:t>AsciiMath playground (WebviewPanel)</a:t>
-            </a:r>
-          </a:p>
-          <a:p>
-            <a:pPr lvl="1"/>
-            <a:r>
-              <a:t>Live rendering of typed AsciiMath; Insert at cursor pastes stem:[…].</a:t>
-            </a:r>
-          </a:p>
-          <a:p>
-            <a:pPr/>
-            <a:r>
-              <a:t>All four are side-by-side beside the editor; reload-free; no separate build step.</a:t>
             </a:r>
           </a:p>
         </p:txBody>
@@ -3723,7 +5084,7 @@
 </file>
 
 <file path=ppt/slides/slide4.xml><?xml version="1.0" encoding="utf-8"?>
-<p:sld xmlns:a="http://schemas.openxmlformats.org/drawingml/2006/main" xmlns:p="http://schemas.openxmlformats.org/presentationml/2006/main" xmlns:r="http://schemas.openxmlformats.org/officeDocument/2006/relationships">
+<p:sld xmlns:a="http://schemas.openxmlformats.org/drawingml/2006/main" xmlns:r="http://schemas.openxmlformats.org/officeDocument/2006/relationships" xmlns:p="http://schemas.openxmlformats.org/presentationml/2006/main">
   <p:cSld>
     <p:spTree>
       <p:nvGrpSpPr>
@@ -3731,7 +5092,14 @@
         <p:cNvGrpSpPr/>
         <p:nvPr/>
       </p:nvGrpSpPr>
-      <p:grpSpPr/>
+      <p:grpSpPr>
+        <a:xfrm>
+          <a:off x="0" y="0"/>
+          <a:ext cx="0" cy="0"/>
+          <a:chOff x="0" y="0"/>
+          <a:chExt cx="0" cy="0"/>
+        </a:xfrm>
+      </p:grpSpPr>
       <p:sp>
         <p:nvSpPr>
           <p:cNvPr id="2" name="Title 1"/>
@@ -3748,7 +5116,7 @@
           <a:lstStyle/>
           <a:p>
             <a:r>
-              <a:t>Annotated EXPRESS — what we read</a:t>
+              <a:t>Four new viewer surfaces (cont.)</a:t>
             </a:r>
           </a:p>
         </p:txBody>
@@ -3773,57 +5141,35 @@
           <a:bodyPr/>
           <a:lstStyle/>
           <a:p>
-            <a:pPr/>
-            <a:r>
-              <a:t>Spec: github.com/metanorma/annotated-express</a:t>
-            </a:r>
-          </a:p>
-          <a:p>
-            <a:pPr/>
-            <a:r>
-              <a:t>Named-remark comments: (*"tag" body *)</a:t>
+            <a:r>
+              <a:rPr sz="1800"/>
+              <a:t>EXPRESS-G interactive viewer (WebviewPanel)</a:t>
             </a:r>
           </a:p>
           <a:p>
             <a:pPr lvl="1"/>
             <a:r>
-              <a:t>Tag: dotted path  schema_name.entity_name[.attribute_name][.__subtype]</a:t>
+              <a:rPr sz="1500"/>
+              <a:t>Click any labelled box; jumps to the entity's source declaration.</a:t>
+            </a:r>
+          </a:p>
+          <a:p>
+            <a:r>
+              <a:rPr sz="1800"/>
+              <a:t>AsciiMath playground (WebviewPanel)</a:t>
             </a:r>
           </a:p>
           <a:p>
             <a:pPr lvl="1"/>
             <a:r>
-              <a:t>Subtypes: __note, __example, __figure, __fund_cons, __expressg</a:t>
-            </a:r>
-          </a:p>
-          <a:p>
-            <a:pPr lvl="1"/>
-            <a:r>
-              <a:t>Body: Metanorma AsciiDoc — bold, links, cross-refs, tables, images, stem:[…]</a:t>
-            </a:r>
-          </a:p>
-          <a:p>
-            <a:pPr/>
-            <a:r>
-              <a:t>Surveyed corpus (sd.iso.org/wg12-step + annotated-express):</a:t>
-            </a:r>
-          </a:p>
-          <a:p>
-            <a:pPr lvl="1"/>
-            <a:r>
-              <a:t>geometry_schema: 754 stem expressions across 16 EXPRESS-G diagrams</a:t>
-            </a:r>
-          </a:p>
-          <a:p>
-            <a:pPr lvl="1"/>
-            <a:r>
-              <a:t>topology / mesh_topology / presentation_appearance / equations: per-schema fixtures committed in test-fixtures/asciimath/</a:t>
-            </a:r>
-          </a:p>
-          <a:p>
-            <a:pPr lvl="1"/>
-            <a:r>
-              <a:t>equations_schema mixes stem:[…] (62) and latexmath:[…] (82) — both rendered</a:t>
+              <a:rPr sz="1500"/>
+              <a:t>Live rendering of typed AsciiMath; Insert at cursor pastes stem:[…].</a:t>
+            </a:r>
+          </a:p>
+          <a:p>
+            <a:r>
+              <a:rPr sz="1800"/>
+              <a:t>All four are side-by-side beside the editor; no separate build step.</a:t>
             </a:r>
           </a:p>
         </p:txBody>
@@ -3837,7 +5183,7 @@
 </file>
 
 <file path=ppt/slides/slide5.xml><?xml version="1.0" encoding="utf-8"?>
-<p:sld xmlns:a="http://schemas.openxmlformats.org/drawingml/2006/main" xmlns:p="http://schemas.openxmlformats.org/presentationml/2006/main" xmlns:r="http://schemas.openxmlformats.org/officeDocument/2006/relationships">
+<p:sld xmlns:a="http://schemas.openxmlformats.org/drawingml/2006/main" xmlns:r="http://schemas.openxmlformats.org/officeDocument/2006/relationships" xmlns:p="http://schemas.openxmlformats.org/presentationml/2006/main">
   <p:cSld>
     <p:spTree>
       <p:nvGrpSpPr>
@@ -3845,7 +5191,14 @@
         <p:cNvGrpSpPr/>
         <p:nvPr/>
       </p:nvGrpSpPr>
-      <p:grpSpPr/>
+      <p:grpSpPr>
+        <a:xfrm>
+          <a:off x="0" y="0"/>
+          <a:ext cx="0" cy="0"/>
+          <a:chOff x="0" y="0"/>
+          <a:chExt cx="0" cy="0"/>
+        </a:xfrm>
+      </p:grpSpPr>
       <p:sp>
         <p:nvSpPr>
           <p:cNvPr id="2" name="Title 1"/>
@@ -3862,7 +5215,7 @@
           <a:lstStyle/>
           <a:p>
             <a:r>
-              <a:t>EXPRESS-G hot-spot navigation</a:t>
+              <a:t>Annotated EXPRESS — format</a:t>
             </a:r>
           </a:p>
         </p:txBody>
@@ -3887,63 +5240,36 @@
           <a:bodyPr/>
           <a:lstStyle/>
           <a:p>
-            <a:pPr/>
-            <a:r>
-              <a:t>Each __expressg remark contains a [.svgmap] block:</a:t>
+            <a:r>
+              <a:rPr sz="1800"/>
+              <a:t>Spec: github.com/metanorma/annotated-express</a:t>
+            </a:r>
+          </a:p>
+          <a:p>
+            <a:r>
+              <a:rPr sz="1800"/>
+              <a:t>Named-remark comments: (*"tag" body *)</a:t>
             </a:r>
           </a:p>
           <a:p>
             <a:pPr lvl="1"/>
             <a:r>
-              <a:t>image::geometry_schemaexpg4.svg[]</a:t>
+              <a:rPr sz="1500"/>
+              <a:t>Tag: dotted path  schema_name.entity_name[.attribute_name][.__subtype]</a:t>
             </a:r>
           </a:p>
           <a:p>
             <a:pPr lvl="1"/>
             <a:r>
-              <a:t>* &lt;&lt;express:geometry_schema.point&gt;&gt;; 37</a:t>
+              <a:rPr sz="1500"/>
+              <a:t>Subtypes: __note, __example, __figure, __fund_cons, __expressg</a:t>
             </a:r>
           </a:p>
           <a:p>
             <a:pPr lvl="1"/>
             <a:r>
-              <a:t>* &lt;&lt;express:geometry_schema.cartesian_point&gt;&gt;; 36  …</a:t>
-            </a:r>
-          </a:p>
-          <a:p>
-            <a:pPr/>
-            <a:r>
-              <a:t>The integer N maps to the SVG's &lt;a href="N"&gt; rectangle overlay.</a:t>
-            </a:r>
-          </a:p>
-          <a:p>
-            <a:pPr/>
-            <a:r>
-              <a:t>Author flow:</a:t>
-            </a:r>
-          </a:p>
-          <a:p>
-            <a:pPr lvl="1"/>
-            <a:r>
-              <a:t>Right-click an entity → Show EXPRESS-G Diagram.</a:t>
-            </a:r>
-          </a:p>
-          <a:p>
-            <a:pPr lvl="1"/>
-            <a:r>
-              <a:t>Picker auto-selects the diagram(s) referencing the cursor entity.</a:t>
-            </a:r>
-          </a:p>
-          <a:p>
-            <a:pPr lvl="1"/>
-            <a:r>
-              <a:t>Click a labelled box → host resolves the entity tag → jumps to source.</a:t>
-            </a:r>
-          </a:p>
-          <a:p>
-            <a:pPr/>
-            <a:r>
-              <a:t>Resolver: IndexManager.allElements() first; fs-scan fallback for dev-host single-file mode.</a:t>
+              <a:rPr sz="1500"/>
+              <a:t>Body: Metanorma AsciiDoc — bold, links, cross-refs, tables, images, stem:[…]</a:t>
             </a:r>
           </a:p>
         </p:txBody>
@@ -3957,7 +5283,7 @@
 </file>
 
 <file path=ppt/slides/slide6.xml><?xml version="1.0" encoding="utf-8"?>
-<p:sld xmlns:a="http://schemas.openxmlformats.org/drawingml/2006/main" xmlns:p="http://schemas.openxmlformats.org/presentationml/2006/main" xmlns:r="http://schemas.openxmlformats.org/officeDocument/2006/relationships">
+<p:sld xmlns:a="http://schemas.openxmlformats.org/drawingml/2006/main" xmlns:r="http://schemas.openxmlformats.org/officeDocument/2006/relationships" xmlns:p="http://schemas.openxmlformats.org/presentationml/2006/main">
   <p:cSld>
     <p:spTree>
       <p:nvGrpSpPr>
@@ -3965,7 +5291,14 @@
         <p:cNvGrpSpPr/>
         <p:nvPr/>
       </p:nvGrpSpPr>
-      <p:grpSpPr/>
+      <p:grpSpPr>
+        <a:xfrm>
+          <a:off x="0" y="0"/>
+          <a:ext cx="0" cy="0"/>
+          <a:chOff x="0" y="0"/>
+          <a:chExt cx="0" cy="0"/>
+        </a:xfrm>
+      </p:grpSpPr>
       <p:sp>
         <p:nvSpPr>
           <p:cNvPr id="2" name="Title 1"/>
@@ -3982,7 +5315,7 @@
           <a:lstStyle/>
           <a:p>
             <a:r>
-              <a:t>Math rendering — same engine Metanorma uses</a:t>
+              <a:t>Annotated EXPRESS — corpus</a:t>
             </a:r>
           </a:p>
         </p:txBody>
@@ -4007,57 +5340,40 @@
           <a:bodyPr/>
           <a:lstStyle/>
           <a:p>
-            <a:pPr/>
-            <a:r>
-              <a:t>Description preview: Plurimath JS (Ribose, BSD-2-Clause).</a:t>
+            <a:r>
+              <a:rPr sz="1800"/>
+              <a:t>Surveyed: sd.iso.org/wg12-step + github.com/metanorma/annotated-express</a:t>
+            </a:r>
+          </a:p>
+          <a:p>
+            <a:r>
+              <a:rPr sz="1800"/>
+              <a:t>geometry_schema: 754 stem expressions, 16 EXPRESS-G diagrams</a:t>
+            </a:r>
+          </a:p>
+          <a:p>
+            <a:r>
+              <a:rPr sz="1800"/>
+              <a:t>topology / mesh_topology / presentation_appearance: per-schema fixtures committed</a:t>
+            </a:r>
+          </a:p>
+          <a:p>
+            <a:r>
+              <a:rPr sz="1800"/>
+              <a:t>equations_schema mixes stem:[…] (62) and latexmath:[…] (82)</a:t>
             </a:r>
           </a:p>
           <a:p>
             <a:pPr lvl="1"/>
             <a:r>
-              <a:t>Same converter the upstream Metanorma toolchain uses.</a:t>
-            </a:r>
-          </a:p>
-          <a:p>
-            <a:pPr lvl="1"/>
-            <a:r>
-              <a:t>Rendering at author time = rendering at publish time.</a:t>
-            </a:r>
-          </a:p>
-          <a:p>
-            <a:pPr lvl="1"/>
-            <a:r>
-              <a:t>Native MathML output; Chromium webview renders it natively (no JS layout library).</a:t>
-            </a:r>
-          </a:p>
-          <a:p>
-            <a:pPr/>
-            <a:r>
-              <a:t>Hover surface: MathJax v4 input/asciimath + output/svg (270 KB).</a:t>
-            </a:r>
-          </a:p>
-          <a:p>
-            <a:pPr lvl="1"/>
-            <a:r>
-              <a:t>Hovers can't host MathML or scripts (CSP); SVG-as-data-URI is the only path.</a:t>
-            </a:r>
-          </a:p>
-          <a:p>
-            <a:pPr lvl="1"/>
-            <a:r>
-              <a:t>Cosmetic mismatch with description preview is acknowledged and minor.</a:t>
-            </a:r>
-          </a:p>
-          <a:p>
-            <a:pPr/>
-            <a:r>
-              <a:t>Both engines accept AsciiMath; Plurimath also accepts LaTeX (latexmath:[…]).</a:t>
-            </a:r>
-          </a:p>
-          <a:p>
-            <a:pPr/>
-            <a:r>
-              <a:t>Resource limits: per-expression 16 KB, per-document 500 stems, 2 s render timeout.</a:t>
+              <a:rPr sz="1500"/>
+              <a:t>Both formats supported; Plurimath natively accepts either.</a:t>
+            </a:r>
+          </a:p>
+          <a:p>
+            <a:r>
+              <a:rPr sz="1800"/>
+              <a:t>Test fixtures: test-fixtures/asciimath/&lt;schema&gt;-examples.json</a:t>
             </a:r>
           </a:p>
         </p:txBody>
@@ -4071,7 +5387,7 @@
 </file>
 
 <file path=ppt/slides/slide7.xml><?xml version="1.0" encoding="utf-8"?>
-<p:sld xmlns:a="http://schemas.openxmlformats.org/drawingml/2006/main" xmlns:p="http://schemas.openxmlformats.org/presentationml/2006/main" xmlns:r="http://schemas.openxmlformats.org/officeDocument/2006/relationships">
+<p:sld xmlns:a="http://schemas.openxmlformats.org/drawingml/2006/main" xmlns:r="http://schemas.openxmlformats.org/officeDocument/2006/relationships" xmlns:p="http://schemas.openxmlformats.org/presentationml/2006/main">
   <p:cSld>
     <p:spTree>
       <p:nvGrpSpPr>
@@ -4079,7 +5395,14 @@
         <p:cNvGrpSpPr/>
         <p:nvPr/>
       </p:nvGrpSpPr>
-      <p:grpSpPr/>
+      <p:grpSpPr>
+        <a:xfrm>
+          <a:off x="0" y="0"/>
+          <a:ext cx="0" cy="0"/>
+          <a:chOff x="0" y="0"/>
+          <a:chExt cx="0" cy="0"/>
+        </a:xfrm>
+      </p:grpSpPr>
       <p:sp>
         <p:nvSpPr>
           <p:cNvPr id="2" name="Title 1"/>
@@ -4096,7 +5419,7 @@
           <a:lstStyle/>
           <a:p>
             <a:r>
-              <a:t>Architecture — three processes, two engines</a:t>
+              <a:t>EXPRESS-G — [.svgmap] block</a:t>
             </a:r>
           </a:p>
         </p:txBody>
@@ -4113,59 +5436,50 @@
         </p:nvSpPr>
         <p:spPr>
           <a:xfrm>
-            <a:off x="822960" y="1097280"/>
-            <a:ext cx="7543800" cy="4773168"/>
+            <a:off x="822960" y="1847088"/>
+            <a:ext cx="7543800" cy="4023360"/>
           </a:xfrm>
         </p:spPr>
         <p:txBody>
           <a:bodyPr/>
           <a:lstStyle/>
           <a:p>
-            <a:pPr/>
-            <a:r>
-              <a:t>Extension host (Node, 780 KB bundle) — orchestration, hover, command handlers.</a:t>
-            </a:r>
-          </a:p>
-          <a:p>
-            <a:pPr/>
-            <a:r>
-              <a:t>Language server (Node, 1.7 MB bundle) — Langium + custom services:</a:t>
+            <a:r>
+              <a:rPr sz="1800"/>
+              <a:t>Each __expressg remark contains a [.svgmap] block:</a:t>
             </a:r>
           </a:p>
           <a:p>
             <a:pPr lvl="1"/>
             <a:r>
-              <a:t>ExpressP11AnnotationIndex — walks ML_COMMENT hidden CST nodes on every parse.</a:t>
+              <a:rPr sz="1500"/>
+              <a:t>image::geometry_schemaexpg4.svg[]</a:t>
             </a:r>
           </a:p>
           <a:p>
             <a:pPr lvl="1"/>
             <a:r>
-              <a:t>Custom LSP requests: express/getAnnotations, …/findAnnotationsForEntity, …/resolveEntity.</a:t>
-            </a:r>
-          </a:p>
-          <a:p>
-            <a:pPr/>
-            <a:r>
-              <a:t>Webview render targets (Chromium) — one WebviewPanel per surface, isolated CSP.</a:t>
-            </a:r>
-          </a:p>
-          <a:p>
-            <a:pPr/>
-            <a:r>
-              <a:t>Plurimath worker (node:worker_threads, 1-pool) — terminate-on-timeout for hung renders.</a:t>
-            </a:r>
-          </a:p>
-          <a:p>
-            <a:pPr/>
-            <a:r>
-              <a:t>MathJax in extension host — for the hover SVG path only.</a:t>
-            </a:r>
-          </a:p>
-          <a:p>
-            <a:pPr/>
-            <a:r>
-              <a:t>Vendor JS: pinned exact versions; @plurimath/plurimath and mathjax marked external.</a:t>
+              <a:rPr sz="1500"/>
+              <a:t>* &lt;&lt;express:geometry_schema.point&gt;&gt;; 37</a:t>
+            </a:r>
+          </a:p>
+          <a:p>
+            <a:pPr lvl="1"/>
+            <a:r>
+              <a:rPr sz="1500"/>
+              <a:t>* &lt;&lt;express:geometry_schema.cartesian_point&gt;&gt;; 36</a:t>
+            </a:r>
+          </a:p>
+          <a:p>
+            <a:r>
+              <a:rPr sz="1800"/>
+              <a:t>The integer N maps to the SVG's &lt;a href="N"&gt; rectangle overlay.</a:t>
+            </a:r>
+          </a:p>
+          <a:p>
+            <a:r>
+              <a:rPr sz="1800"/>
+              <a:t>Annotation index parses block once per document parse.</a:t>
             </a:r>
           </a:p>
         </p:txBody>
@@ -4179,7 +5493,7 @@
 </file>
 
 <file path=ppt/slides/slide8.xml><?xml version="1.0" encoding="utf-8"?>
-<p:sld xmlns:a="http://schemas.openxmlformats.org/drawingml/2006/main" xmlns:p="http://schemas.openxmlformats.org/presentationml/2006/main" xmlns:r="http://schemas.openxmlformats.org/officeDocument/2006/relationships">
+<p:sld xmlns:a="http://schemas.openxmlformats.org/drawingml/2006/main" xmlns:r="http://schemas.openxmlformats.org/officeDocument/2006/relationships" xmlns:p="http://schemas.openxmlformats.org/presentationml/2006/main">
   <p:cSld>
     <p:spTree>
       <p:nvGrpSpPr>
@@ -4187,7 +5501,14 @@
         <p:cNvGrpSpPr/>
         <p:nvPr/>
       </p:nvGrpSpPr>
-      <p:grpSpPr/>
+      <p:grpSpPr>
+        <a:xfrm>
+          <a:off x="0" y="0"/>
+          <a:ext cx="0" cy="0"/>
+          <a:chOff x="0" y="0"/>
+          <a:chExt cx="0" cy="0"/>
+        </a:xfrm>
+      </p:grpSpPr>
       <p:sp>
         <p:nvSpPr>
           <p:cNvPr id="2" name="Title 1"/>
@@ -4204,7 +5525,7 @@
           <a:lstStyle/>
           <a:p>
             <a:r>
-              <a:t>Data privacy — what leaves your machine</a:t>
+              <a:t>EXPRESS-G — author flow + resolver</a:t>
             </a:r>
           </a:p>
         </p:txBody>
@@ -4221,77 +5542,49 @@
         </p:nvSpPr>
         <p:spPr>
           <a:xfrm>
-            <a:off x="822960" y="1097280"/>
-            <a:ext cx="7543800" cy="4773168"/>
+            <a:off x="822960" y="1847088"/>
+            <a:ext cx="7543800" cy="4023360"/>
           </a:xfrm>
         </p:spPr>
         <p:txBody>
           <a:bodyPr/>
           <a:lstStyle/>
           <a:p>
-            <a:pPr/>
-            <a:r>
-              <a:t>easyEXPRESS itself: zero outbound network calls.</a:t>
+            <a:r>
+              <a:rPr sz="1800"/>
+              <a:t>Right-click an entity → Show EXPRESS-G Diagram.</a:t>
+            </a:r>
+          </a:p>
+          <a:p>
+            <a:r>
+              <a:rPr sz="1800"/>
+              <a:t>Picker auto-selects the diagram(s) referencing the cursor entity.</a:t>
+            </a:r>
+          </a:p>
+          <a:p>
+            <a:r>
+              <a:rPr sz="1800"/>
+              <a:t>Click a labelled box → host resolves the entity → jumps to source.</a:t>
+            </a:r>
+          </a:p>
+          <a:p>
+            <a:r>
+              <a:rPr sz="1800"/>
+              <a:t>Resolver: IndexManager.allElements() first.</a:t>
             </a:r>
           </a:p>
           <a:p>
             <a:pPr lvl="1"/>
             <a:r>
-              <a:t>Every webview has CSP connect-src 'none' (Chromium refuses fetch/XHR/WebSocket).</a:t>
+              <a:rPr sz="1500"/>
+              <a:t>Filesystem-scan fallback for dev-host single-file mode.</a:t>
             </a:r>
           </a:p>
           <a:p>
             <a:pPr lvl="1"/>
             <a:r>
-              <a:t>Extension host has no fetch / no http(s) require / no telemetry SDK (greppable).</a:t>
-            </a:r>
-          </a:p>
-          <a:p>
-            <a:pPr lvl="1"/>
-            <a:r>
-              <a:t>Verifiable: $ grep -rE 'fetch\(|require\(.https?.\)' src/  → empty.</a:t>
-            </a:r>
-          </a:p>
-          <a:p>
-            <a:pPr/>
-            <a:r>
-              <a:t>But VS Code Insiders ships GitHub Copilot Chat as a built-in feature.</a:t>
-            </a:r>
-          </a:p>
-          <a:p>
-            <a:pPr lvl="1"/>
-            <a:r>
-              <a:t>--disable-extensions does NOT remove it (it's part of the editor shell).</a:t>
-            </a:r>
-          </a:p>
-          <a:p>
-            <a:pPr lvl="1"/>
-            <a:r>
-              <a:t>Explain / Add File to Chat / Open Inline Chat / Review send the cursor word, enclosing scope, surrounding lines, and snippets from other open editors to GitHub/MS endpoints.</a:t>
-            </a:r>
-          </a:p>
-          <a:p>
-            <a:pPr/>
-            <a:r>
-              <a:t>Mitigation for pre-publication content under NDA:</a:t>
-            </a:r>
-          </a:p>
-          <a:p>
-            <a:pPr lvl="1"/>
-            <a:r>
-              <a:t>Sign out of GitHub in the affected VS Code window (account icon, bottom-left).</a:t>
-            </a:r>
-          </a:p>
-          <a:p>
-            <a:pPr lvl="1"/>
-            <a:r>
-              <a:t>Set chat.disableAIFeatures: true in workspace settings.</a:t>
-            </a:r>
-          </a:p>
-          <a:p>
-            <a:pPr lvl="1"/>
-            <a:r>
-              <a:t>Recommended: a separate, signed-out window for any sensitive standards work.</a:t>
+              <a:rPr sz="1500"/>
+              <a:t>Path components validated for empty, '.', '..', '/', '\' before path.join.</a:t>
             </a:r>
           </a:p>
         </p:txBody>
@@ -4305,7 +5598,7 @@
 </file>
 
 <file path=ppt/slides/slide9.xml><?xml version="1.0" encoding="utf-8"?>
-<p:sld xmlns:a="http://schemas.openxmlformats.org/drawingml/2006/main" xmlns:p="http://schemas.openxmlformats.org/presentationml/2006/main" xmlns:r="http://schemas.openxmlformats.org/officeDocument/2006/relationships">
+<p:sld xmlns:a="http://schemas.openxmlformats.org/drawingml/2006/main" xmlns:r="http://schemas.openxmlformats.org/officeDocument/2006/relationships" xmlns:p="http://schemas.openxmlformats.org/presentationml/2006/main">
   <p:cSld>
     <p:spTree>
       <p:nvGrpSpPr>
@@ -4313,7 +5606,14 @@
         <p:cNvGrpSpPr/>
         <p:nvPr/>
       </p:nvGrpSpPr>
-      <p:grpSpPr/>
+      <p:grpSpPr>
+        <a:xfrm>
+          <a:off x="0" y="0"/>
+          <a:ext cx="0" cy="0"/>
+          <a:chOff x="0" y="0"/>
+          <a:chExt cx="0" cy="0"/>
+        </a:xfrm>
+      </p:grpSpPr>
       <p:sp>
         <p:nvSpPr>
           <p:cNvPr id="2" name="Title 1"/>
@@ -4330,7 +5630,7 @@
           <a:lstStyle/>
           <a:p>
             <a:r>
-              <a:t>Performance — instrumented, in-channel</a:t>
+              <a:t>Math rendering — Plurimath for description preview</a:t>
             </a:r>
           </a:p>
         </p:txBody>
@@ -4355,63 +5655,42 @@
           <a:bodyPr/>
           <a:lstStyle/>
           <a:p>
-            <a:pPr/>
-            <a:r>
-              <a:t>Every user-facing path is wrapped with perf.time(label).</a:t>
-            </a:r>
-          </a:p>
-          <a:p>
-            <a:pPr/>
-            <a:r>
-              <a:t>Logs to OutputChannel "easyEXPRESS Viewers" with timestamp and over-budget flag.</a:t>
-            </a:r>
-          </a:p>
-          <a:p>
-            <a:pPr/>
-            <a:r>
-              <a:t>Phase-0 baselines (warm machine, geometry_schema corpus):</a:t>
+            <a:r>
+              <a:rPr sz="1800"/>
+              <a:t>Plurimath JS (Ribose, BSD-2-Clause).</a:t>
             </a:r>
           </a:p>
           <a:p>
             <a:pPr lvl="1"/>
             <a:r>
-              <a:t>activate: 500 ms target / 1 500 ms warn</a:t>
+              <a:rPr sz="1500"/>
+              <a:t>Same converter the upstream Metanorma toolchain uses.</a:t>
             </a:r>
           </a:p>
           <a:p>
             <a:pPr lvl="1"/>
             <a:r>
-              <a:t>hover warm: ~50 ms / first-with-math: ~180 ms (MathJax cold-load)</a:t>
+              <a:rPr sz="1500"/>
+              <a:t>Author-time rendering = publish-time rendering.</a:t>
             </a:r>
           </a:p>
           <a:p>
             <a:pPr lvl="1"/>
             <a:r>
-              <a:t>showDescription: ~600 ms first / ~200 ms warm</a:t>
-            </a:r>
-          </a:p>
-          <a:p>
-            <a:pPr lvl="1"/>
-            <a:r>
-              <a:t>showExpressG: ~400 ms</a:t>
-            </a:r>
-          </a:p>
-          <a:p>
-            <a:pPr lvl="1"/>
-            <a:r>
-              <a:t>math playground render-after-stop-typing: ≤ 200 ms (worker round-trip)</a:t>
-            </a:r>
-          </a:p>
-          <a:p>
-            <a:pPr/>
-            <a:r>
-              <a:t>Bundle: extension host 780 KB, language server 1.7 MB, vendor 3.9 MB.</a:t>
-            </a:r>
-          </a:p>
-          <a:p>
-            <a:pPr/>
-            <a:r>
-              <a:t>.vsix: 8.3 MB / 195 files (well under marketplace 100 MB cap).</a:t>
+              <a:rPr sz="1500"/>
+              <a:t>Native MathML output; Chromium webview renders it natively.</a:t>
+            </a:r>
+          </a:p>
+          <a:p>
+            <a:r>
+              <a:rPr sz="1800"/>
+              <a:t>Runs in a node:worker_threads worker — terminate-on-timeout for hung renders.</a:t>
+            </a:r>
+          </a:p>
+          <a:p>
+            <a:r>
+              <a:rPr sz="1800"/>
+              <a:t>Accepts both AsciiMath and LaTeX (latexmath:[…]).</a:t>
             </a:r>
           </a:p>
         </p:txBody>
@@ -4742,4 +6021,319 @@
   </a:objectDefaults>
   <a:extraClrSchemeLst/>
 </a:theme>
+</file>
+
+<file path=ppt/theme/theme2.xml><?xml version="1.0" encoding="utf-8"?>
+<a:theme xmlns:a="http://schemas.openxmlformats.org/drawingml/2006/main" name="Office Theme">
+  <a:themeElements>
+    <a:clrScheme name="Office">
+      <a:dk1>
+        <a:sysClr val="windowText" lastClr="000000"/>
+      </a:dk1>
+      <a:lt1>
+        <a:sysClr val="window" lastClr="FFFFFF"/>
+      </a:lt1>
+      <a:dk2>
+        <a:srgbClr val="0E2841"/>
+      </a:dk2>
+      <a:lt2>
+        <a:srgbClr val="E8E8E8"/>
+      </a:lt2>
+      <a:accent1>
+        <a:srgbClr val="156082"/>
+      </a:accent1>
+      <a:accent2>
+        <a:srgbClr val="E97132"/>
+      </a:accent2>
+      <a:accent3>
+        <a:srgbClr val="196B24"/>
+      </a:accent3>
+      <a:accent4>
+        <a:srgbClr val="0F9ED5"/>
+      </a:accent4>
+      <a:accent5>
+        <a:srgbClr val="A02B93"/>
+      </a:accent5>
+      <a:accent6>
+        <a:srgbClr val="4EA72E"/>
+      </a:accent6>
+      <a:hlink>
+        <a:srgbClr val="467886"/>
+      </a:hlink>
+      <a:folHlink>
+        <a:srgbClr val="96607D"/>
+      </a:folHlink>
+    </a:clrScheme>
+    <a:fontScheme name="Office">
+      <a:majorFont>
+        <a:latin typeface="Aptos Display" panose="02110004020202020204"/>
+        <a:ea typeface=""/>
+        <a:cs typeface=""/>
+        <a:font script="Jpan" typeface="游ゴシック Light"/>
+        <a:font script="Hang" typeface="맑은 고딕"/>
+        <a:font script="Hans" typeface="等线 Light"/>
+        <a:font script="Hant" typeface="新細明體"/>
+        <a:font script="Arab" typeface="Times New Roman"/>
+        <a:font script="Hebr" typeface="Times New Roman"/>
+        <a:font script="Thai" typeface="Angsana New"/>
+        <a:font script="Ethi" typeface="Nyala"/>
+        <a:font script="Beng" typeface="Vrinda"/>
+        <a:font script="Gujr" typeface="Shruti"/>
+        <a:font script="Khmr" typeface="MoolBoran"/>
+        <a:font script="Knda" typeface="Tunga"/>
+        <a:font script="Guru" typeface="Raavi"/>
+        <a:font script="Cans" typeface="Euphemia"/>
+        <a:font script="Cher" typeface="Plantagenet Cherokee"/>
+        <a:font script="Yiii" typeface="Microsoft Yi Baiti"/>
+        <a:font script="Tibt" typeface="Microsoft Himalaya"/>
+        <a:font script="Thaa" typeface="MV Boli"/>
+        <a:font script="Deva" typeface="Mangal"/>
+        <a:font script="Telu" typeface="Gautami"/>
+        <a:font script="Taml" typeface="Latha"/>
+        <a:font script="Syrc" typeface="Estrangelo Edessa"/>
+        <a:font script="Orya" typeface="Kalinga"/>
+        <a:font script="Mlym" typeface="Kartika"/>
+        <a:font script="Laoo" typeface="DokChampa"/>
+        <a:font script="Sinh" typeface="Iskoola Pota"/>
+        <a:font script="Mong" typeface="Mongolian Baiti"/>
+        <a:font script="Viet" typeface="Times New Roman"/>
+        <a:font script="Uigh" typeface="Microsoft Uighur"/>
+        <a:font script="Geor" typeface="Sylfaen"/>
+        <a:font script="Armn" typeface="Arial"/>
+        <a:font script="Bugi" typeface="Leelawadee UI"/>
+        <a:font script="Bopo" typeface="Microsoft JhengHei"/>
+        <a:font script="Java" typeface="Javanese Text"/>
+        <a:font script="Lisu" typeface="Segoe UI"/>
+        <a:font script="Mymr" typeface="Myanmar Text"/>
+        <a:font script="Nkoo" typeface="Ebrima"/>
+        <a:font script="Olck" typeface="Nirmala UI"/>
+        <a:font script="Osma" typeface="Ebrima"/>
+        <a:font script="Phag" typeface="Phagspa"/>
+        <a:font script="Syrn" typeface="Estrangelo Edessa"/>
+        <a:font script="Syrj" typeface="Estrangelo Edessa"/>
+        <a:font script="Syre" typeface="Estrangelo Edessa"/>
+        <a:font script="Sora" typeface="Nirmala UI"/>
+        <a:font script="Tale" typeface="Microsoft Tai Le"/>
+        <a:font script="Talu" typeface="Microsoft New Tai Lue"/>
+        <a:font script="Tfng" typeface="Ebrima"/>
+      </a:majorFont>
+      <a:minorFont>
+        <a:latin typeface="Aptos" panose="02110004020202020204"/>
+        <a:ea typeface=""/>
+        <a:cs typeface=""/>
+        <a:font script="Jpan" typeface="游ゴシック"/>
+        <a:font script="Hang" typeface="맑은 고딕"/>
+        <a:font script="Hans" typeface="等线"/>
+        <a:font script="Hant" typeface="新細明體"/>
+        <a:font script="Arab" typeface="Arial"/>
+        <a:font script="Hebr" typeface="Arial"/>
+        <a:font script="Thai" typeface="Cordia New"/>
+        <a:font script="Ethi" typeface="Nyala"/>
+        <a:font script="Beng" typeface="Vrinda"/>
+        <a:font script="Gujr" typeface="Shruti"/>
+        <a:font script="Khmr" typeface="DaunPenh"/>
+        <a:font script="Knda" typeface="Tunga"/>
+        <a:font script="Guru" typeface="Raavi"/>
+        <a:font script="Cans" typeface="Euphemia"/>
+        <a:font script="Cher" typeface="Plantagenet Cherokee"/>
+        <a:font script="Yiii" typeface="Microsoft Yi Baiti"/>
+        <a:font script="Tibt" typeface="Microsoft Himalaya"/>
+        <a:font script="Thaa" typeface="MV Boli"/>
+        <a:font script="Deva" typeface="Mangal"/>
+        <a:font script="Telu" typeface="Gautami"/>
+        <a:font script="Taml" typeface="Latha"/>
+        <a:font script="Syrc" typeface="Estrangelo Edessa"/>
+        <a:font script="Orya" typeface="Kalinga"/>
+        <a:font script="Mlym" typeface="Kartika"/>
+        <a:font script="Laoo" typeface="DokChampa"/>
+        <a:font script="Sinh" typeface="Iskoola Pota"/>
+        <a:font script="Mong" typeface="Mongolian Baiti"/>
+        <a:font script="Viet" typeface="Arial"/>
+        <a:font script="Uigh" typeface="Microsoft Uighur"/>
+        <a:font script="Geor" typeface="Sylfaen"/>
+        <a:font script="Armn" typeface="Arial"/>
+        <a:font script="Bugi" typeface="Leelawadee UI"/>
+        <a:font script="Bopo" typeface="Microsoft JhengHei"/>
+        <a:font script="Java" typeface="Javanese Text"/>
+        <a:font script="Lisu" typeface="Segoe UI"/>
+        <a:font script="Mymr" typeface="Myanmar Text"/>
+        <a:font script="Nkoo" typeface="Ebrima"/>
+        <a:font script="Olck" typeface="Nirmala UI"/>
+        <a:font script="Osma" typeface="Ebrima"/>
+        <a:font script="Phag" typeface="Phagspa"/>
+        <a:font script="Syrn" typeface="Estrangelo Edessa"/>
+        <a:font script="Syrj" typeface="Estrangelo Edessa"/>
+        <a:font script="Syre" typeface="Estrangelo Edessa"/>
+        <a:font script="Sora" typeface="Nirmala UI"/>
+        <a:font script="Tale" typeface="Microsoft Tai Le"/>
+        <a:font script="Talu" typeface="Microsoft New Tai Lue"/>
+        <a:font script="Tfng" typeface="Ebrima"/>
+      </a:minorFont>
+    </a:fontScheme>
+    <a:fmtScheme name="Office">
+      <a:fillStyleLst>
+        <a:solidFill>
+          <a:schemeClr val="phClr"/>
+        </a:solidFill>
+        <a:gradFill rotWithShape="1">
+          <a:gsLst>
+            <a:gs pos="0">
+              <a:schemeClr val="phClr">
+                <a:lumMod val="110000"/>
+                <a:satMod val="105000"/>
+                <a:tint val="67000"/>
+              </a:schemeClr>
+            </a:gs>
+            <a:gs pos="50000">
+              <a:schemeClr val="phClr">
+                <a:lumMod val="105000"/>
+                <a:satMod val="103000"/>
+                <a:tint val="73000"/>
+              </a:schemeClr>
+            </a:gs>
+            <a:gs pos="100000">
+              <a:schemeClr val="phClr">
+                <a:lumMod val="105000"/>
+                <a:satMod val="109000"/>
+                <a:tint val="81000"/>
+              </a:schemeClr>
+            </a:gs>
+          </a:gsLst>
+          <a:lin ang="5400000" scaled="0"/>
+        </a:gradFill>
+        <a:gradFill rotWithShape="1">
+          <a:gsLst>
+            <a:gs pos="0">
+              <a:schemeClr val="phClr">
+                <a:satMod val="103000"/>
+                <a:lumMod val="102000"/>
+                <a:tint val="94000"/>
+              </a:schemeClr>
+            </a:gs>
+            <a:gs pos="50000">
+              <a:schemeClr val="phClr">
+                <a:satMod val="110000"/>
+                <a:lumMod val="100000"/>
+                <a:shade val="100000"/>
+              </a:schemeClr>
+            </a:gs>
+            <a:gs pos="100000">
+              <a:schemeClr val="phClr">
+                <a:lumMod val="99000"/>
+                <a:satMod val="120000"/>
+                <a:shade val="78000"/>
+              </a:schemeClr>
+            </a:gs>
+          </a:gsLst>
+          <a:lin ang="5400000" scaled="0"/>
+        </a:gradFill>
+      </a:fillStyleLst>
+      <a:lnStyleLst>
+        <a:ln w="12700" cap="flat" cmpd="sng" algn="ctr">
+          <a:solidFill>
+            <a:schemeClr val="phClr"/>
+          </a:solidFill>
+          <a:prstDash val="solid"/>
+          <a:miter lim="800000"/>
+        </a:ln>
+        <a:ln w="19050" cap="flat" cmpd="sng" algn="ctr">
+          <a:solidFill>
+            <a:schemeClr val="phClr"/>
+          </a:solidFill>
+          <a:prstDash val="solid"/>
+          <a:miter lim="800000"/>
+        </a:ln>
+        <a:ln w="25400" cap="flat" cmpd="sng" algn="ctr">
+          <a:solidFill>
+            <a:schemeClr val="phClr"/>
+          </a:solidFill>
+          <a:prstDash val="solid"/>
+          <a:miter lim="800000"/>
+        </a:ln>
+      </a:lnStyleLst>
+      <a:effectStyleLst>
+        <a:effectStyle>
+          <a:effectLst/>
+        </a:effectStyle>
+        <a:effectStyle>
+          <a:effectLst/>
+        </a:effectStyle>
+        <a:effectStyle>
+          <a:effectLst>
+            <a:outerShdw blurRad="57150" dist="19050" dir="5400000" algn="ctr" rotWithShape="0">
+              <a:srgbClr val="000000">
+                <a:alpha val="63000"/>
+              </a:srgbClr>
+            </a:outerShdw>
+          </a:effectLst>
+        </a:effectStyle>
+      </a:effectStyleLst>
+      <a:bgFillStyleLst>
+        <a:solidFill>
+          <a:schemeClr val="phClr"/>
+        </a:solidFill>
+        <a:solidFill>
+          <a:schemeClr val="phClr">
+            <a:tint val="95000"/>
+            <a:satMod val="170000"/>
+          </a:schemeClr>
+        </a:solidFill>
+        <a:gradFill rotWithShape="1">
+          <a:gsLst>
+            <a:gs pos="0">
+              <a:schemeClr val="phClr">
+                <a:tint val="93000"/>
+                <a:satMod val="150000"/>
+                <a:shade val="98000"/>
+                <a:lumMod val="102000"/>
+              </a:schemeClr>
+            </a:gs>
+            <a:gs pos="50000">
+              <a:schemeClr val="phClr">
+                <a:tint val="98000"/>
+                <a:satMod val="130000"/>
+                <a:shade val="90000"/>
+                <a:lumMod val="103000"/>
+              </a:schemeClr>
+            </a:gs>
+            <a:gs pos="100000">
+              <a:schemeClr val="phClr">
+                <a:shade val="63000"/>
+                <a:satMod val="120000"/>
+              </a:schemeClr>
+            </a:gs>
+          </a:gsLst>
+          <a:lin ang="5400000" scaled="0"/>
+        </a:gradFill>
+      </a:bgFillStyleLst>
+    </a:fmtScheme>
+  </a:themeElements>
+  <a:objectDefaults>
+    <a:lnDef>
+      <a:spPr/>
+      <a:bodyPr/>
+      <a:lstStyle/>
+      <a:style>
+        <a:lnRef idx="2">
+          <a:schemeClr val="accent1"/>
+        </a:lnRef>
+        <a:fillRef idx="0">
+          <a:schemeClr val="accent1"/>
+        </a:fillRef>
+        <a:effectRef idx="1">
+          <a:schemeClr val="accent1"/>
+        </a:effectRef>
+        <a:fontRef idx="minor">
+          <a:schemeClr val="tx1"/>
+        </a:fontRef>
+      </a:style>
+    </a:lnDef>
+  </a:objectDefaults>
+  <a:extraClrSchemeLst/>
+  <a:extLst>
+    <a:ext uri="{05A4C25C-085E-4340-85A3-A5531E510DB2}">
+      <thm15:themeFamily xmlns:thm15="http://schemas.microsoft.com/office/thememl/2012/main" name="Office Theme" id="{2E142A2C-CD16-42D6-873A-C26D2A0506FA}" vid="{1BDDFF52-6CD6-40A5-AB3C-68EB2F1E4D0A}"/>
+    </a:ext>
+  </a:extLst>
+</a:theme>
 </file>